--- a/ece407/407-4562870-2026/lec1.pptx
+++ b/ece407/407-4562870-2026/lec1.pptx
@@ -5,38 +5,39 @@
     <p:sldMasterId id="2147483648" r:id="rId1"/>
   </p:sldMasterIdLst>
   <p:notesMasterIdLst>
-    <p:notesMasterId r:id="rId31"/>
+    <p:notesMasterId r:id="rId32"/>
   </p:notesMasterIdLst>
   <p:sldIdLst>
-    <p:sldId id="257" r:id="rId2"/>
-    <p:sldId id="258" r:id="rId3"/>
-    <p:sldId id="528" r:id="rId4"/>
-    <p:sldId id="270" r:id="rId5"/>
-    <p:sldId id="539" r:id="rId6"/>
-    <p:sldId id="260" r:id="rId7"/>
+    <p:sldId id="553" r:id="rId2"/>
+    <p:sldId id="554" r:id="rId3"/>
+    <p:sldId id="555" r:id="rId4"/>
+    <p:sldId id="556" r:id="rId5"/>
+    <p:sldId id="557" r:id="rId6"/>
+    <p:sldId id="558" r:id="rId7"/>
     <p:sldId id="261" r:id="rId8"/>
     <p:sldId id="523" r:id="rId9"/>
     <p:sldId id="544" r:id="rId10"/>
     <p:sldId id="545" r:id="rId11"/>
-    <p:sldId id="534" r:id="rId12"/>
-    <p:sldId id="263" r:id="rId13"/>
+    <p:sldId id="562" r:id="rId12"/>
+    <p:sldId id="563" r:id="rId13"/>
     <p:sldId id="551" r:id="rId14"/>
     <p:sldId id="547" r:id="rId15"/>
-    <p:sldId id="548" r:id="rId16"/>
+    <p:sldId id="564" r:id="rId16"/>
     <p:sldId id="540" r:id="rId17"/>
     <p:sldId id="549" r:id="rId18"/>
     <p:sldId id="550" r:id="rId19"/>
-    <p:sldId id="273" r:id="rId20"/>
-    <p:sldId id="535" r:id="rId21"/>
-    <p:sldId id="409" r:id="rId22"/>
-    <p:sldId id="411" r:id="rId23"/>
-    <p:sldId id="536" r:id="rId24"/>
-    <p:sldId id="537" r:id="rId25"/>
-    <p:sldId id="264" r:id="rId26"/>
-    <p:sldId id="265" r:id="rId27"/>
-    <p:sldId id="538" r:id="rId28"/>
-    <p:sldId id="381" r:id="rId29"/>
-    <p:sldId id="382" r:id="rId30"/>
+    <p:sldId id="561" r:id="rId20"/>
+    <p:sldId id="273" r:id="rId21"/>
+    <p:sldId id="535" r:id="rId22"/>
+    <p:sldId id="409" r:id="rId23"/>
+    <p:sldId id="411" r:id="rId24"/>
+    <p:sldId id="536" r:id="rId25"/>
+    <p:sldId id="537" r:id="rId26"/>
+    <p:sldId id="566" r:id="rId27"/>
+    <p:sldId id="265" r:id="rId28"/>
+    <p:sldId id="568" r:id="rId29"/>
+    <p:sldId id="381" r:id="rId30"/>
+    <p:sldId id="382" r:id="rId31"/>
   </p:sldIdLst>
   <p:sldSz cx="12192000" cy="6858000"/>
   <p:notesSz cx="6858000" cy="9144000"/>
@@ -135,6 +136,11 @@
       </a:defRPr>
     </a:lvl9pPr>
   </p:defaultTextStyle>
+  <p:extLst>
+    <p:ext uri="{EFAFB233-063F-42B5-8137-9DF3F51BA10A}">
+      <p15:sldGuideLst xmlns:p15="http://schemas.microsoft.com/office/powerpoint/2012/main"/>
+    </p:ext>
+  </p:extLst>
 </p:presentation>
 </file>
 
@@ -220,7 +226,7 @@
           <a:p>
             <a:fld id="{34955FF5-7124-694A-A660-6D23DB922C18}" type="datetimeFigureOut">
               <a:rPr lang="en-US" smtClean="0"/>
-              <a:t>8/24/25</a:t>
+              <a:t>8/25/26</a:t>
             </a:fld>
             <a:endParaRPr lang="en-US"/>
           </a:p>
@@ -506,19 +512,7 @@
       </p:grpSpPr>
       <p:sp>
         <p:nvSpPr>
-          <p:cNvPr id="2" name="Slide Image Placeholder 1"/>
-          <p:cNvSpPr>
-            <a:spLocks noGrp="1" noRot="1" noChangeAspect="1"/>
-          </p:cNvSpPr>
-          <p:nvPr>
-            <p:ph type="sldImg"/>
-          </p:nvPr>
-        </p:nvSpPr>
-        <p:spPr/>
-      </p:sp>
-      <p:sp>
-        <p:nvSpPr>
-          <p:cNvPr id="3" name="Notes Placeholder 2"/>
+          <p:cNvPr id="2" name="Notes Placeholder 1"/>
           <p:cNvSpPr>
             <a:spLocks noGrp="1"/>
           </p:cNvSpPr>
@@ -531,39 +525,32 @@
           <a:bodyPr/>
           <a:lstStyle/>
           <a:p>
-            <a:endParaRPr lang="en-US" dirty="0"/>
-          </a:p>
-        </p:txBody>
-      </p:sp>
-      <p:sp>
-        <p:nvSpPr>
-          <p:cNvPr id="4" name="Slide Number Placeholder 3"/>
-          <p:cNvSpPr>
-            <a:spLocks noGrp="1"/>
-          </p:cNvSpPr>
-          <p:nvPr>
-            <p:ph type="sldNum" sz="quarter" idx="5"/>
-          </p:nvPr>
-        </p:nvSpPr>
-        <p:spPr/>
-        <p:txBody>
-          <a:bodyPr/>
-          <a:lstStyle/>
-          <a:p>
-            <a:fld id="{E41E8587-C61B-49BA-BD3C-A9EE353D70EB}" type="slidenum">
-              <a:rPr lang="en-US" smtClean="0"/>
-              <a:t>6</a:t>
-            </a:fld>
-            <a:endParaRPr lang="en-US"/>
+            <a:r>
+              <a:rPr lang="en-US" dirty="0"/>
+              <a:t>[~1 min] Welcome to ECE/CS 407, Cryptography. I'm Ning Luo.</a:t>
+            </a:r>
+          </a:p>
+          <a:p>
+            <a:r>
+              <a:rPr lang="en-US" dirty="0"/>
+              <a:t>Today has two halves. First, the logistics: how the course runs, how you're graded, and what I expect from you. Second, the fun part: what cryptography actually is, what this course is and is not about, and a refresher on the math we'll lean on all semester.</a:t>
+            </a:r>
+          </a:p>
+          <a:p>
+            <a:r>
+              <a:rPr lang="en-US" dirty="0"/>
+              <a:t>Opening hook: cryptography is the only field where we routinely prove that an attacker with a supercomputer still cannot do something. By the end of this course you'll be able to write those proofs yourself.</a:t>
+            </a:r>
+          </a:p>
+          <a:p>
+            <a:r>
+              <a:rPr lang="en-US" dirty="0"/>
+              <a:t>Housekeeping: ask questions at any point — do not wait until the end.</a:t>
+            </a:r>
           </a:p>
         </p:txBody>
       </p:sp>
     </p:spTree>
-    <p:extLst>
-      <p:ext uri="{BB962C8B-B14F-4D97-AF65-F5344CB8AC3E}">
-        <p14:creationId xmlns:p14="http://schemas.microsoft.com/office/powerpoint/2010/main" val="3346692481"/>
-      </p:ext>
-    </p:extLst>
   </p:cSld>
   <p:clrMapOvr>
     <a:masterClrMapping/>
@@ -572,6 +559,260 @@
 </file>
 
 <file path=ppt/notesSlides/notesSlide2.xml><?xml version="1.0" encoding="utf-8"?>
+<p:notes xmlns:a="http://schemas.openxmlformats.org/drawingml/2006/main" xmlns:r="http://schemas.openxmlformats.org/officeDocument/2006/relationships" xmlns:p="http://schemas.openxmlformats.org/presentationml/2006/main">
+  <p:cSld>
+    <p:spTree>
+      <p:nvGrpSpPr>
+        <p:cNvPr id="1" name=""/>
+        <p:cNvGrpSpPr/>
+        <p:nvPr/>
+      </p:nvGrpSpPr>
+      <p:grpSpPr>
+        <a:xfrm>
+          <a:off x="0" y="0"/>
+          <a:ext cx="0" cy="0"/>
+          <a:chOff x="0" y="0"/>
+          <a:chExt cx="0" cy="0"/>
+        </a:xfrm>
+      </p:grpSpPr>
+      <p:sp>
+        <p:nvSpPr>
+          <p:cNvPr id="2" name="Notes Placeholder 1"/>
+          <p:cNvSpPr>
+            <a:spLocks noGrp="1"/>
+          </p:cNvSpPr>
+          <p:nvPr>
+            <p:ph type="body" idx="1"/>
+          </p:nvPr>
+        </p:nvSpPr>
+        <p:spPr/>
+        <p:txBody>
+          <a:bodyPr/>
+          <a:lstStyle/>
+          <a:p>
+            <a:r>
+              <a:rPr lang="en-US" dirty="0"/>
+              <a:t>[~2 min] Quick introduction so you know who you're spending the semester with.</a:t>
+            </a:r>
+          </a:p>
+          <a:p>
+            <a:r>
+              <a:rPr lang="en-US" dirty="0"/>
+              <a:t>I'm an assistant professor here at UIUC since 2024. Before that I was a postdoc at Northwestern, and I did my PhD at Yale, finishing in 2022.</a:t>
+            </a:r>
+          </a:p>
+          <a:p>
+            <a:r>
+              <a:rPr lang="en-US" dirty="0"/>
+              <a:t>My research sits at the intersection of cryptography, formal methods, and automated reasoning — essentially, using machine-checkable reasoning to make privacy and security guarantees hold up in real deployed systems, not just on paper.</a:t>
+            </a:r>
+          </a:p>
+          <a:p>
+            <a:r>
+              <a:rPr lang="en-US" dirty="0"/>
+              <a:t>My office is CSL 457. Email is on the slide; please put ECE407 in the subject line. If you're curious about research or looking for a project, come to office hours — that's the easiest way to start a conversation.</a:t>
+            </a:r>
+          </a:p>
+        </p:txBody>
+      </p:sp>
+    </p:spTree>
+  </p:cSld>
+  <p:clrMapOvr>
+    <a:masterClrMapping/>
+  </p:clrMapOvr>
+</p:notes>
+</file>
+
+<file path=ppt/notesSlides/notesSlide3.xml><?xml version="1.0" encoding="utf-8"?>
+<p:notes xmlns:a="http://schemas.openxmlformats.org/drawingml/2006/main" xmlns:r="http://schemas.openxmlformats.org/officeDocument/2006/relationships" xmlns:p="http://schemas.openxmlformats.org/presentationml/2006/main">
+  <p:cSld>
+    <p:spTree>
+      <p:nvGrpSpPr>
+        <p:cNvPr id="1" name=""/>
+        <p:cNvGrpSpPr/>
+        <p:nvPr/>
+      </p:nvGrpSpPr>
+      <p:grpSpPr>
+        <a:xfrm>
+          <a:off x="0" y="0"/>
+          <a:ext cx="0" cy="0"/>
+          <a:chOff x="0" y="0"/>
+          <a:chExt cx="0" cy="0"/>
+        </a:xfrm>
+      </p:grpSpPr>
+      <p:sp>
+        <p:nvSpPr>
+          <p:cNvPr id="2" name="Notes Placeholder 1"/>
+          <p:cNvSpPr>
+            <a:spLocks noGrp="1"/>
+          </p:cNvSpPr>
+          <p:nvPr>
+            <p:ph type="body" idx="1"/>
+          </p:nvPr>
+        </p:nvSpPr>
+        <p:spPr/>
+        <p:txBody>
+          <a:bodyPr/>
+          <a:lstStyle/>
+          <a:p>
+            <a:r>
+              <a:rPr lang="en-US" dirty="0"/>
+              <a:t>[~1 min] Logistics. We meet Tuesdays and Thursdays, 5:00 to 6:20 pm, in ECEB 1013. Please come on time — I tend to put the key definition of the day in the first ten minutes.</a:t>
+            </a:r>
+          </a:p>
+          <a:p>
+            <a:r>
+              <a:rPr lang="en-US" dirty="0"/>
+              <a:t>My office hours are still TBD; I'll post them on the course page and announce them on Canvas within the first week. Same for our TA, Pranav Rajpal.</a:t>
+            </a:r>
+          </a:p>
+          <a:p>
+            <a:r>
+              <a:rPr lang="en-US" dirty="0"/>
+              <a:t>Between the two of us you'll have coverage most days of the week. If neither slot works for you, email me and we'll find a time — I'd much rather meet you than have you stuck on a problem set for three hours.</a:t>
+            </a:r>
+          </a:p>
+        </p:txBody>
+      </p:sp>
+    </p:spTree>
+  </p:cSld>
+  <p:clrMapOvr>
+    <a:masterClrMapping/>
+  </p:clrMapOvr>
+</p:notes>
+</file>
+
+<file path=ppt/notesSlides/notesSlide4.xml><?xml version="1.0" encoding="utf-8"?>
+<p:notes xmlns:a="http://schemas.openxmlformats.org/drawingml/2006/main" xmlns:r="http://schemas.openxmlformats.org/officeDocument/2006/relationships" xmlns:p="http://schemas.openxmlformats.org/presentationml/2006/main">
+  <p:cSld>
+    <p:spTree>
+      <p:nvGrpSpPr>
+        <p:cNvPr id="1" name=""/>
+        <p:cNvGrpSpPr/>
+        <p:nvPr/>
+      </p:nvGrpSpPr>
+      <p:grpSpPr>
+        <a:xfrm>
+          <a:off x="0" y="0"/>
+          <a:ext cx="0" cy="0"/>
+          <a:chOff x="0" y="0"/>
+          <a:chExt cx="0" cy="0"/>
+        </a:xfrm>
+      </p:grpSpPr>
+      <p:sp>
+        <p:nvSpPr>
+          <p:cNvPr id="2" name="Notes Placeholder 1"/>
+          <p:cNvSpPr>
+            <a:spLocks noGrp="1"/>
+          </p:cNvSpPr>
+          <p:nvPr>
+            <p:ph type="body" idx="1"/>
+          </p:nvPr>
+        </p:nvSpPr>
+        <p:spPr/>
+        <p:txBody>
+          <a:bodyPr/>
+          <a:lstStyle/>
+          <a:p>
+            <a:r>
+              <a:rPr lang="en-US" dirty="0"/>
+              <a:t>[~2 min] Four places you need to bookmark today.</a:t>
+            </a:r>
+          </a:p>
+          <a:p>
+            <a:r>
+              <a:rPr lang="en-US" dirty="0"/>
+              <a:t>The course webpage is the syllabus of record — schedule, readings, policies. Canvas is where slides, assignments, grades, and announcements live, and where in-class quizzes happen, so bring a device you can submit from.</a:t>
+            </a:r>
+          </a:p>
+          <a:p>
+            <a:r>
+              <a:rPr lang="en-US" dirty="0"/>
+              <a:t>Piazza is for questions. Post there rather than emailing me individually — if one of you is confused, usually five others are too, and everyone benefits from the answer.</a:t>
+            </a:r>
+          </a:p>
+          <a:p>
+            <a:r>
+              <a:rPr lang="en-US" dirty="0"/>
+              <a:t>And yes, the Piazza access code is the MD5 hash of 'I love cryptography'. That's your first exercise: go compute it. If you don't know what MD5 is yet — you will by week four, and by then you'll also know why nobody should still be using it.</a:t>
+            </a:r>
+          </a:p>
+        </p:txBody>
+      </p:sp>
+    </p:spTree>
+  </p:cSld>
+  <p:clrMapOvr>
+    <a:masterClrMapping/>
+  </p:clrMapOvr>
+</p:notes>
+</file>
+
+<file path=ppt/notesSlides/notesSlide5.xml><?xml version="1.0" encoding="utf-8"?>
+<p:notes xmlns:a="http://schemas.openxmlformats.org/drawingml/2006/main" xmlns:r="http://schemas.openxmlformats.org/officeDocument/2006/relationships" xmlns:p="http://schemas.openxmlformats.org/presentationml/2006/main">
+  <p:cSld>
+    <p:spTree>
+      <p:nvGrpSpPr>
+        <p:cNvPr id="1" name=""/>
+        <p:cNvGrpSpPr/>
+        <p:nvPr/>
+      </p:nvGrpSpPr>
+      <p:grpSpPr>
+        <a:xfrm>
+          <a:off x="0" y="0"/>
+          <a:ext cx="0" cy="0"/>
+          <a:chOff x="0" y="0"/>
+          <a:chExt cx="0" cy="0"/>
+        </a:xfrm>
+      </p:grpSpPr>
+      <p:sp>
+        <p:nvSpPr>
+          <p:cNvPr id="2" name="Notes Placeholder 1"/>
+          <p:cNvSpPr>
+            <a:spLocks noGrp="1"/>
+          </p:cNvSpPr>
+          <p:nvPr>
+            <p:ph type="body" idx="1"/>
+          </p:nvPr>
+        </p:nvSpPr>
+        <p:spPr/>
+        <p:txBody>
+          <a:bodyPr/>
+          <a:lstStyle/>
+          <a:p>
+            <a:r>
+              <a:rPr lang="en-US" dirty="0"/>
+              <a:t>[~2 min] Prerequisites. Formally, CS 225 and CS/ECE 374. If you don't have both, talk to me — I consider overrides case by case, but I want to be honest with you about what you'll be walking into.</a:t>
+            </a:r>
+          </a:p>
+          <a:p>
+            <a:r>
+              <a:rPr lang="en-US" dirty="0"/>
+              <a:t>What actually matters is not the course numbers, it's three habits of mind. One: you're comfortable reading and writing a proof, especially a reduction. Two: basic discrete probability — conditional probability, independence, expectation. Three: modular arithmetic and logarithms.</a:t>
+            </a:r>
+          </a:p>
+          <a:p>
+            <a:r>
+              <a:rPr lang="en-US" dirty="0"/>
+              <a:t>374 matters most because this course is fundamentally about reductions: 'if you could break my scheme, you could solve this problem nobody knows how to solve.' That is the same move as an NP-hardness reduction, pointed in a different direction.</a:t>
+            </a:r>
+          </a:p>
+          <a:p>
+            <a:r>
+              <a:rPr lang="en-US" dirty="0"/>
+              <a:t>The last third of today's lecture is a refresher on exactly this math, so use it as a self-assessment. If most of it feels new rather than rusty, come talk to me after class.</a:t>
+            </a:r>
+          </a:p>
+        </p:txBody>
+      </p:sp>
+    </p:spTree>
+  </p:cSld>
+  <p:clrMapOvr>
+    <a:masterClrMapping/>
+  </p:clrMapOvr>
+</p:notes>
+</file>
+
+<file path=ppt/notesSlides/notesSlide6.xml><?xml version="1.0" encoding="utf-8"?>
 <p:notes xmlns:a="http://schemas.openxmlformats.org/drawingml/2006/main" xmlns:r="http://schemas.openxmlformats.org/officeDocument/2006/relationships" xmlns:p="http://schemas.openxmlformats.org/presentationml/2006/main">
   <p:cSld>
     <p:spTree>
@@ -615,7 +856,7 @@
           <a:bodyPr/>
           <a:lstStyle/>
           <a:p>
-            <a:endParaRPr lang="en-US"/>
+            <a:endParaRPr lang="en-US" dirty="0"/>
           </a:p>
         </p:txBody>
       </p:sp>
@@ -634,9 +875,9 @@
           <a:bodyPr/>
           <a:lstStyle/>
           <a:p>
-            <a:fld id="{BD7409B2-D19D-154D-8FCE-B29D1C1795CC}" type="slidenum">
+            <a:fld id="{E41E8587-C61B-49BA-BD3C-A9EE353D70EB}" type="slidenum">
               <a:rPr lang="en-US" smtClean="0"/>
-              <a:t>10</a:t>
+              <a:t>6</a:t>
             </a:fld>
             <a:endParaRPr lang="en-US"/>
           </a:p>
@@ -645,7 +886,7 @@
     </p:spTree>
     <p:extLst>
       <p:ext uri="{BB962C8B-B14F-4D97-AF65-F5344CB8AC3E}">
-        <p14:creationId xmlns:p14="http://schemas.microsoft.com/office/powerpoint/2010/main" val="4237432963"/>
+        <p14:creationId xmlns:p14="http://schemas.microsoft.com/office/powerpoint/2010/main" val="3346692481"/>
       </p:ext>
     </p:extLst>
   </p:cSld>
@@ -655,7 +896,7 @@
 </p:notes>
 </file>
 
-<file path=ppt/notesSlides/notesSlide3.xml><?xml version="1.0" encoding="utf-8"?>
+<file path=ppt/notesSlides/notesSlide7.xml><?xml version="1.0" encoding="utf-8"?>
 <p:notes xmlns:a="http://schemas.openxmlformats.org/drawingml/2006/main" xmlns:r="http://schemas.openxmlformats.org/officeDocument/2006/relationships" xmlns:p="http://schemas.openxmlformats.org/presentationml/2006/main">
   <p:cSld>
     <p:spTree>
@@ -720,6 +961,90 @@
           <a:p>
             <a:fld id="{BD7409B2-D19D-154D-8FCE-B29D1C1795CC}" type="slidenum">
               <a:rPr lang="en-US" smtClean="0"/>
+              <a:t>10</a:t>
+            </a:fld>
+            <a:endParaRPr lang="en-US"/>
+          </a:p>
+        </p:txBody>
+      </p:sp>
+    </p:spTree>
+    <p:extLst>
+      <p:ext uri="{BB962C8B-B14F-4D97-AF65-F5344CB8AC3E}">
+        <p14:creationId xmlns:p14="http://schemas.microsoft.com/office/powerpoint/2010/main" val="4237432963"/>
+      </p:ext>
+    </p:extLst>
+  </p:cSld>
+  <p:clrMapOvr>
+    <a:masterClrMapping/>
+  </p:clrMapOvr>
+</p:notes>
+</file>
+
+<file path=ppt/notesSlides/notesSlide8.xml><?xml version="1.0" encoding="utf-8"?>
+<p:notes xmlns:a="http://schemas.openxmlformats.org/drawingml/2006/main" xmlns:r="http://schemas.openxmlformats.org/officeDocument/2006/relationships" xmlns:p="http://schemas.openxmlformats.org/presentationml/2006/main">
+  <p:cSld>
+    <p:spTree>
+      <p:nvGrpSpPr>
+        <p:cNvPr id="1" name=""/>
+        <p:cNvGrpSpPr/>
+        <p:nvPr/>
+      </p:nvGrpSpPr>
+      <p:grpSpPr>
+        <a:xfrm>
+          <a:off x="0" y="0"/>
+          <a:ext cx="0" cy="0"/>
+          <a:chOff x="0" y="0"/>
+          <a:chExt cx="0" cy="0"/>
+        </a:xfrm>
+      </p:grpSpPr>
+      <p:sp>
+        <p:nvSpPr>
+          <p:cNvPr id="2" name="Slide Image Placeholder 1"/>
+          <p:cNvSpPr>
+            <a:spLocks noGrp="1" noRot="1" noChangeAspect="1"/>
+          </p:cNvSpPr>
+          <p:nvPr>
+            <p:ph type="sldImg"/>
+          </p:nvPr>
+        </p:nvSpPr>
+        <p:spPr/>
+      </p:sp>
+      <p:sp>
+        <p:nvSpPr>
+          <p:cNvPr id="3" name="Notes Placeholder 2"/>
+          <p:cNvSpPr>
+            <a:spLocks noGrp="1"/>
+          </p:cNvSpPr>
+          <p:nvPr>
+            <p:ph type="body" idx="1"/>
+          </p:nvPr>
+        </p:nvSpPr>
+        <p:spPr/>
+        <p:txBody>
+          <a:bodyPr/>
+          <a:lstStyle/>
+          <a:p>
+            <a:endParaRPr lang="en-US"/>
+          </a:p>
+        </p:txBody>
+      </p:sp>
+      <p:sp>
+        <p:nvSpPr>
+          <p:cNvPr id="4" name="Slide Number Placeholder 3"/>
+          <p:cNvSpPr>
+            <a:spLocks noGrp="1"/>
+          </p:cNvSpPr>
+          <p:nvPr>
+            <p:ph type="sldNum" sz="quarter" idx="5"/>
+          </p:nvPr>
+        </p:nvSpPr>
+        <p:spPr/>
+        <p:txBody>
+          <a:bodyPr/>
+          <a:lstStyle/>
+          <a:p>
+            <a:fld id="{BD7409B2-D19D-154D-8FCE-B29D1C1795CC}" type="slidenum">
+              <a:rPr lang="en-US" smtClean="0"/>
               <a:t>17</a:t>
             </a:fld>
             <a:endParaRPr lang="en-US"/>
@@ -739,7 +1064,7 @@
 </p:notes>
 </file>
 
-<file path=ppt/notesSlides/notesSlide4.xml><?xml version="1.0" encoding="utf-8"?>
+<file path=ppt/notesSlides/notesSlide9.xml><?xml version="1.0" encoding="utf-8"?>
 <p:notes xmlns:a="http://schemas.openxmlformats.org/drawingml/2006/main" xmlns:r="http://schemas.openxmlformats.org/officeDocument/2006/relationships" xmlns:p="http://schemas.openxmlformats.org/presentationml/2006/main">
   <p:cSld>
     <p:spTree>
@@ -994,7 +1319,7 @@
           <a:p>
             <a:fld id="{F95C2319-EA73-404D-B671-5D095DF8A582}" type="datetimeFigureOut">
               <a:rPr lang="en-US" smtClean="0"/>
-              <a:t>8/24/25</a:t>
+              <a:t>8/25/26</a:t>
             </a:fld>
             <a:endParaRPr lang="en-US"/>
           </a:p>
@@ -1192,7 +1517,7 @@
           <a:p>
             <a:fld id="{F95C2319-EA73-404D-B671-5D095DF8A582}" type="datetimeFigureOut">
               <a:rPr lang="en-US" smtClean="0"/>
-              <a:t>8/24/25</a:t>
+              <a:t>8/25/26</a:t>
             </a:fld>
             <a:endParaRPr lang="en-US"/>
           </a:p>
@@ -1400,7 +1725,7 @@
           <a:p>
             <a:fld id="{F95C2319-EA73-404D-B671-5D095DF8A582}" type="datetimeFigureOut">
               <a:rPr lang="en-US" smtClean="0"/>
-              <a:t>8/24/25</a:t>
+              <a:t>8/25/26</a:t>
             </a:fld>
             <a:endParaRPr lang="en-US"/>
           </a:p>
@@ -1598,7 +1923,7 @@
           <a:p>
             <a:fld id="{F95C2319-EA73-404D-B671-5D095DF8A582}" type="datetimeFigureOut">
               <a:rPr lang="en-US" smtClean="0"/>
-              <a:t>8/24/25</a:t>
+              <a:t>8/25/26</a:t>
             </a:fld>
             <a:endParaRPr lang="en-US"/>
           </a:p>
@@ -1873,7 +2198,7 @@
           <a:p>
             <a:fld id="{F95C2319-EA73-404D-B671-5D095DF8A582}" type="datetimeFigureOut">
               <a:rPr lang="en-US" smtClean="0"/>
-              <a:t>8/24/25</a:t>
+              <a:t>8/25/26</a:t>
             </a:fld>
             <a:endParaRPr lang="en-US"/>
           </a:p>
@@ -2138,7 +2463,7 @@
           <a:p>
             <a:fld id="{F95C2319-EA73-404D-B671-5D095DF8A582}" type="datetimeFigureOut">
               <a:rPr lang="en-US" smtClean="0"/>
-              <a:t>8/24/25</a:t>
+              <a:t>8/25/26</a:t>
             </a:fld>
             <a:endParaRPr lang="en-US"/>
           </a:p>
@@ -2550,7 +2875,7 @@
           <a:p>
             <a:fld id="{F95C2319-EA73-404D-B671-5D095DF8A582}" type="datetimeFigureOut">
               <a:rPr lang="en-US" smtClean="0"/>
-              <a:t>8/24/25</a:t>
+              <a:t>8/25/26</a:t>
             </a:fld>
             <a:endParaRPr lang="en-US"/>
           </a:p>
@@ -2691,7 +3016,7 @@
           <a:p>
             <a:fld id="{F95C2319-EA73-404D-B671-5D095DF8A582}" type="datetimeFigureOut">
               <a:rPr lang="en-US" smtClean="0"/>
-              <a:t>8/24/25</a:t>
+              <a:t>8/25/26</a:t>
             </a:fld>
             <a:endParaRPr lang="en-US"/>
           </a:p>
@@ -2804,7 +3129,7 @@
           <a:p>
             <a:fld id="{F95C2319-EA73-404D-B671-5D095DF8A582}" type="datetimeFigureOut">
               <a:rPr lang="en-US" smtClean="0"/>
-              <a:t>8/24/25</a:t>
+              <a:t>8/25/26</a:t>
             </a:fld>
             <a:endParaRPr lang="en-US"/>
           </a:p>
@@ -3115,7 +3440,7 @@
           <a:p>
             <a:fld id="{F95C2319-EA73-404D-B671-5D095DF8A582}" type="datetimeFigureOut">
               <a:rPr lang="en-US" smtClean="0"/>
-              <a:t>8/24/25</a:t>
+              <a:t>8/25/26</a:t>
             </a:fld>
             <a:endParaRPr lang="en-US"/>
           </a:p>
@@ -3403,7 +3728,7 @@
           <a:p>
             <a:fld id="{F95C2319-EA73-404D-B671-5D095DF8A582}" type="datetimeFigureOut">
               <a:rPr lang="en-US" smtClean="0"/>
-              <a:t>8/24/25</a:t>
+              <a:t>8/25/26</a:t>
             </a:fld>
             <a:endParaRPr lang="en-US"/>
           </a:p>
@@ -3644,7 +3969,7 @@
           <a:p>
             <a:fld id="{F95C2319-EA73-404D-B671-5D095DF8A582}" type="datetimeFigureOut">
               <a:rPr lang="en-US" smtClean="0"/>
-              <a:t>8/24/25</a:t>
+              <a:t>8/25/26</a:t>
             </a:fld>
             <a:endParaRPr lang="en-US"/>
           </a:p>
@@ -4107,7 +4432,7 @@
     </p:spTree>
     <p:extLst>
       <p:ext uri="{BB962C8B-B14F-4D97-AF65-F5344CB8AC3E}">
-        <p14:creationId xmlns:p14="http://schemas.microsoft.com/office/powerpoint/2010/main" val="2265253590"/>
+        <p14:creationId xmlns:p14="http://schemas.microsoft.com/office/powerpoint/2010/main" val="636360171"/>
       </p:ext>
     </p:extLst>
   </p:cSld>
@@ -4261,7 +4586,7 @@
       </p:sp>
       <p:pic>
         <p:nvPicPr>
-          <p:cNvPr id="5" name="Picture 4">
+          <p:cNvPr id="5" name="Picture 4" descr="Cover of a cryptocurrency textbook, crossed out with a red X: this course is not about cryptocurrency or blockchain.">
             <a:extLst>
               <a:ext uri="{FF2B5EF4-FFF2-40B4-BE49-F238E27FC236}">
                 <a16:creationId xmlns:a16="http://schemas.microsoft.com/office/drawing/2014/main" id="{DF119B94-1D41-EA3B-8569-79ECDB402405}"/>
@@ -4291,7 +4616,7 @@
       </p:pic>
       <p:pic>
         <p:nvPicPr>
-          <p:cNvPr id="7" name="Picture 6">
+          <p:cNvPr id="7" name="Picture 6" descr="Stock photo of a hooded figure typing at a laptop in a dark room, crossed out with a red X: this course is not about hacking or breaking into systems.">
             <a:extLst>
               <a:ext uri="{FF2B5EF4-FFF2-40B4-BE49-F238E27FC236}">
                 <a16:creationId xmlns:a16="http://schemas.microsoft.com/office/drawing/2014/main" id="{3173FFD4-CF6E-2416-6ECB-663A2E21C757}"/>
@@ -4321,7 +4646,7 @@
       </p:pic>
       <p:pic>
         <p:nvPicPr>
-          <p:cNvPr id="11" name="Picture 10">
+          <p:cNvPr id="11" name="Picture 10" descr="Large red X mark, meaning 'not this topic'.">
             <a:extLst>
               <a:ext uri="{FF2B5EF4-FFF2-40B4-BE49-F238E27FC236}">
                 <a16:creationId xmlns:a16="http://schemas.microsoft.com/office/drawing/2014/main" id="{D7623A8E-0329-99A6-E14C-8277E9D4C1B0}"/>
@@ -4351,7 +4676,7 @@
       </p:pic>
       <p:pic>
         <p:nvPicPr>
-          <p:cNvPr id="12" name="Picture 11">
+          <p:cNvPr id="12" name="Picture 11" descr="Large red X mark, meaning 'not this topic'.">
             <a:extLst>
               <a:ext uri="{FF2B5EF4-FFF2-40B4-BE49-F238E27FC236}">
                 <a16:creationId xmlns:a16="http://schemas.microsoft.com/office/drawing/2014/main" id="{A0D5F136-9AB4-4B58-D8D4-2CA1CB50B06B}"/>
@@ -4382,7 +4707,7 @@
     </p:spTree>
     <p:extLst>
       <p:ext uri="{BB962C8B-B14F-4D97-AF65-F5344CB8AC3E}">
-        <p14:creationId xmlns:p14="http://schemas.microsoft.com/office/powerpoint/2010/main" val="3934280364"/>
+        <p14:creationId xmlns:p14="http://schemas.microsoft.com/office/powerpoint/2010/main" val="582344368"/>
       </p:ext>
     </p:extLst>
   </p:cSld>
@@ -4539,58 +4864,9 @@
           </a:p>
         </p:txBody>
       </p:sp>
-      <p:sp>
-        <p:nvSpPr>
-          <p:cNvPr id="3" name="Content Placeholder 2">
-            <a:extLst>
-              <a:ext uri="{FF2B5EF4-FFF2-40B4-BE49-F238E27FC236}">
-                <a16:creationId xmlns:a16="http://schemas.microsoft.com/office/drawing/2014/main" id="{BED1B98B-5A16-447D-8565-2D4538499952}"/>
-              </a:ext>
-            </a:extLst>
-          </p:cNvPr>
-          <p:cNvSpPr>
-            <a:spLocks noGrp="1"/>
-          </p:cNvSpPr>
-          <p:nvPr>
-            <p:ph idx="1"/>
-          </p:nvPr>
-        </p:nvSpPr>
-        <p:spPr>
-          <a:xfrm>
-            <a:off x="789584" y="1533434"/>
-            <a:ext cx="10515600" cy="4522889"/>
-          </a:xfrm>
-        </p:spPr>
-        <p:txBody>
-          <a:bodyPr/>
-          <a:lstStyle/>
-          <a:p>
-            <a:r>
-              <a:rPr lang="en-US" sz="2400" dirty="0"/>
-              <a:t>Web browsing</a:t>
-            </a:r>
-          </a:p>
-          <a:p>
-            <a:r>
-              <a:rPr lang="en-US" sz="2400" dirty="0"/>
-              <a:t>Data on computers and mobile phones</a:t>
-            </a:r>
-          </a:p>
-          <a:p>
-            <a:r>
-              <a:rPr lang="en-US" sz="2400" dirty="0"/>
-              <a:t>Data collected by companies</a:t>
-            </a:r>
-          </a:p>
-          <a:p>
-            <a:pPr lvl="1"/>
-            <a:endParaRPr lang="en-US" dirty="0"/>
-          </a:p>
-        </p:txBody>
-      </p:sp>
       <p:pic>
         <p:nvPicPr>
-          <p:cNvPr id="4" name="Picture 3">
+          <p:cNvPr id="4" name="Picture 3" descr="News article screenshot reporting that personal data on roughly 200 million voters was left exposed online.">
             <a:extLst>
               <a:ext uri="{FF2B5EF4-FFF2-40B4-BE49-F238E27FC236}">
                 <a16:creationId xmlns:a16="http://schemas.microsoft.com/office/drawing/2014/main" id="{BE352BC8-8605-43BC-A6EE-B9958CD54BB8}"/>
@@ -4610,7 +4886,7 @@
         </p:blipFill>
         <p:spPr>
           <a:xfrm>
-            <a:off x="808751" y="3147215"/>
+            <a:off x="789584" y="1932332"/>
             <a:ext cx="5267401" cy="4785775"/>
           </a:xfrm>
           <a:prstGeom prst="rect">
@@ -4620,7 +4896,7 @@
       </p:pic>
       <p:pic>
         <p:nvPicPr>
-          <p:cNvPr id="5" name="Picture 4">
+          <p:cNvPr id="5" name="Picture 4" descr="News article screenshot: FedEx customer data left publicly exposed, including about 119,000 scanned documents.">
             <a:extLst>
               <a:ext uri="{FF2B5EF4-FFF2-40B4-BE49-F238E27FC236}">
                 <a16:creationId xmlns:a16="http://schemas.microsoft.com/office/drawing/2014/main" id="{10CA4ED3-77DF-4DC6-829B-A2D3EDBF85E1}"/>
@@ -4650,7 +4926,7 @@
       </p:pic>
       <p:pic>
         <p:nvPicPr>
-          <p:cNvPr id="6" name="Picture 5">
+          <p:cNvPr id="6" name="Picture 5" descr="Wall Street Journal article screenshot about political debate over restricting state-level AI laws and AI usage.">
             <a:extLst>
               <a:ext uri="{FF2B5EF4-FFF2-40B4-BE49-F238E27FC236}">
                 <a16:creationId xmlns:a16="http://schemas.microsoft.com/office/drawing/2014/main" id="{39F9871E-5D62-421F-81F3-ACCCF52EAA82}"/>
@@ -4680,7 +4956,7 @@
       </p:pic>
       <p:pic>
         <p:nvPicPr>
-          <p:cNvPr id="8" name="Picture 7" descr="A screenshot of a phone&#10;&#10;AI-generated content may be incorrect.">
+          <p:cNvPr id="8" name="Picture 7" descr="News article screenshot: Cloudflare secures sensitive customer data and restricts AI usage in its deployments.">
             <a:extLst>
               <a:ext uri="{FF2B5EF4-FFF2-40B4-BE49-F238E27FC236}">
                 <a16:creationId xmlns:a16="http://schemas.microsoft.com/office/drawing/2014/main" id="{B03809ED-6993-552E-B647-17B59013FE20}"/>
@@ -4715,7 +4991,7 @@
       </p:pic>
       <p:pic>
         <p:nvPicPr>
-          <p:cNvPr id="10" name="Picture 9" descr="A close-up of a building&#10;&#10;AI-generated content may be incorrect.">
+          <p:cNvPr id="10" name="Picture 9" descr="Screenshot of a published list of organizations recently hit by cyberattacks and data breaches.">
             <a:extLst>
               <a:ext uri="{FF2B5EF4-FFF2-40B4-BE49-F238E27FC236}">
                 <a16:creationId xmlns:a16="http://schemas.microsoft.com/office/drawing/2014/main" id="{4763386C-ADEF-538C-7972-A4A5994B86B2}"/>
@@ -4777,51 +5053,33 @@
       </p:sp>
       <p:sp>
         <p:nvSpPr>
-          <p:cNvPr id="13" name="TextBox 12">
+          <p:cNvPr id="9" name="Content Placeholder 8">
             <a:extLst>
               <a:ext uri="{FF2B5EF4-FFF2-40B4-BE49-F238E27FC236}">
-                <a16:creationId xmlns:a16="http://schemas.microsoft.com/office/drawing/2014/main" id="{A39917B5-231B-6707-8C46-5476070CF347}"/>
+                <a16:creationId xmlns:a16="http://schemas.microsoft.com/office/drawing/2014/main" id="{0346DF75-9AFE-CFEC-7E81-E0687C231918}"/>
               </a:ext>
             </a:extLst>
           </p:cNvPr>
-          <p:cNvSpPr txBox="1"/>
-          <p:nvPr/>
+          <p:cNvSpPr>
+            <a:spLocks noGrp="1"/>
+          </p:cNvSpPr>
+          <p:nvPr>
+            <p:ph idx="1"/>
+          </p:nvPr>
         </p:nvSpPr>
-        <p:spPr>
-          <a:xfrm>
-            <a:off x="2289746" y="2120832"/>
-            <a:ext cx="8079997" cy="954107"/>
-          </a:xfrm>
-          <a:prstGeom prst="rect">
-            <a:avLst/>
-          </a:prstGeom>
-          <a:solidFill>
-            <a:srgbClr val="FFFF00"/>
-          </a:solidFill>
-        </p:spPr>
+        <p:spPr/>
         <p:txBody>
-          <a:bodyPr wrap="square" rtlCol="0">
-            <a:spAutoFit/>
-          </a:bodyPr>
+          <a:bodyPr/>
           <a:lstStyle/>
           <a:p>
-            <a:pPr algn="ctr"/>
-            <a:r>
-              <a:rPr lang="en-US" sz="2800" b="1" dirty="0">
-                <a:solidFill>
-                  <a:srgbClr val="FF0000"/>
-                </a:solidFill>
-                <a:latin typeface="+mj-lt"/>
-              </a:rPr>
-              <a:t>CS 598: Security and Privacy in Machine Learning: Beyond Reactive Approaches </a:t>
-            </a:r>
+            <a:endParaRPr lang="en-US"/>
           </a:p>
         </p:txBody>
       </p:sp>
     </p:spTree>
     <p:extLst>
       <p:ext uri="{BB962C8B-B14F-4D97-AF65-F5344CB8AC3E}">
-        <p14:creationId xmlns:p14="http://schemas.microsoft.com/office/powerpoint/2010/main" val="3121102167"/>
+        <p14:creationId xmlns:p14="http://schemas.microsoft.com/office/powerpoint/2010/main" val="2867990481"/>
       </p:ext>
     </p:extLst>
   </p:cSld>
@@ -5061,97 +5319,6 @@
                       </p:childTnLst>
                     </p:cTn>
                   </p:par>
-                  <p:par>
-                    <p:cTn id="23" fill="hold">
-                      <p:stCondLst>
-                        <p:cond delay="indefinite"/>
-                      </p:stCondLst>
-                      <p:childTnLst>
-                        <p:par>
-                          <p:cTn id="24" fill="hold">
-                            <p:stCondLst>
-                              <p:cond delay="0"/>
-                            </p:stCondLst>
-                            <p:childTnLst>
-                              <p:par>
-                                <p:cTn id="25" presetID="2" presetClass="entr" presetSubtype="4" fill="hold" grpId="0" nodeType="clickEffect">
-                                  <p:stCondLst>
-                                    <p:cond delay="0"/>
-                                  </p:stCondLst>
-                                  <p:childTnLst>
-                                    <p:set>
-                                      <p:cBhvr>
-                                        <p:cTn id="26" dur="1" fill="hold">
-                                          <p:stCondLst>
-                                            <p:cond delay="0"/>
-                                          </p:stCondLst>
-                                        </p:cTn>
-                                        <p:tgtEl>
-                                          <p:spTgt spid="13"/>
-                                        </p:tgtEl>
-                                        <p:attrNameLst>
-                                          <p:attrName>style.visibility</p:attrName>
-                                        </p:attrNameLst>
-                                      </p:cBhvr>
-                                      <p:to>
-                                        <p:strVal val="visible"/>
-                                      </p:to>
-                                    </p:set>
-                                    <p:anim calcmode="lin" valueType="num">
-                                      <p:cBhvr additive="base">
-                                        <p:cTn id="27" dur="500" fill="hold"/>
-                                        <p:tgtEl>
-                                          <p:spTgt spid="13"/>
-                                        </p:tgtEl>
-                                        <p:attrNameLst>
-                                          <p:attrName>ppt_x</p:attrName>
-                                        </p:attrNameLst>
-                                      </p:cBhvr>
-                                      <p:tavLst>
-                                        <p:tav tm="0">
-                                          <p:val>
-                                            <p:strVal val="#ppt_x"/>
-                                          </p:val>
-                                        </p:tav>
-                                        <p:tav tm="100000">
-                                          <p:val>
-                                            <p:strVal val="#ppt_x"/>
-                                          </p:val>
-                                        </p:tav>
-                                      </p:tavLst>
-                                    </p:anim>
-                                    <p:anim calcmode="lin" valueType="num">
-                                      <p:cBhvr additive="base">
-                                        <p:cTn id="28" dur="500" fill="hold"/>
-                                        <p:tgtEl>
-                                          <p:spTgt spid="13"/>
-                                        </p:tgtEl>
-                                        <p:attrNameLst>
-                                          <p:attrName>ppt_y</p:attrName>
-                                        </p:attrNameLst>
-                                      </p:cBhvr>
-                                      <p:tavLst>
-                                        <p:tav tm="0">
-                                          <p:val>
-                                            <p:strVal val="1+#ppt_h/2"/>
-                                          </p:val>
-                                        </p:tav>
-                                        <p:tav tm="100000">
-                                          <p:val>
-                                            <p:strVal val="#ppt_y"/>
-                                          </p:val>
-                                        </p:tav>
-                                      </p:tavLst>
-                                    </p:anim>
-                                  </p:childTnLst>
-                                </p:cTn>
-                              </p:par>
-                            </p:childTnLst>
-                          </p:cTn>
-                        </p:par>
-                      </p:childTnLst>
-                    </p:cTn>
-                  </p:par>
                 </p:childTnLst>
               </p:cTn>
               <p:prevCondLst>
@@ -5173,9 +5340,6 @@
         </p:cTn>
       </p:par>
     </p:tnLst>
-    <p:bldLst>
-      <p:bldP spid="13" grpId="0" animBg="1"/>
-    </p:bldLst>
   </p:timing>
 </p:sld>
 </file>
@@ -5760,7 +5924,7 @@
       </p:grpSpPr>
       <p:pic>
         <p:nvPicPr>
-          <p:cNvPr id="6" name="Picture 5">
+          <p:cNvPr id="6" name="Picture 5" descr="Course schedule table, 15 weeks, with Tuesday and Thursday topics. Weeks 1 to 6, symmetric key cryptography: Week 1, Aug 26, introduction and background on cryptography, then one-time pad and information-theoretic security. Week 2, Sep 2, stream ciphers, then PRG, pseudorandomness and CPA. Week 3, Sep 9, block ciphers, DES and attacks, then AES and block ciphers from PRG, PRP, PRF. Week 4, Sep 16, one-time key versus many-time key and modes of operation, then padding-oracle attacks. Week 5, Sep 23, Message Authentication Codes, then generic birthday attack and cryptographic hash. Week 6, Sep 30, Merkle-Damgard paradigm and Merkle hash tree, then HMAC and authenticated encryption. Week 7, Oct 7, midterm, then first presentation. Weeks 8 to 12, public key cryptography: Week 8, Oct 14, number theory, then Diffie-Hellman key exchange. Week 9, Oct 21, trapdoor permutations and public-key encryption, then RSA-based public-key encryption. Week 10, Oct 28, discrete-log-based public-key encryption, then digital signatures. Week 11, Nov 4, RSA signature and BLS signature, then one-way functions and Lamport signature. Week 12, Nov 11, blind signatures, then multi-party computation. Weeks 13 to 15, advanced topics: Week 13, Nov 18, zero-knowledge proof, then indistinguishability obfuscation. Week 14, Nov 25, Fall Break. Week 15, Dec 2, presentation, then final exam review.">
             <a:extLst>
               <a:ext uri="{FF2B5EF4-FFF2-40B4-BE49-F238E27FC236}">
                 <a16:creationId xmlns:a16="http://schemas.microsoft.com/office/drawing/2014/main" id="{AF30286A-0DA3-DE60-6807-13F4079E9476}"/>
@@ -6087,7 +6251,7 @@
     </p:spTree>
     <p:extLst>
       <p:ext uri="{BB962C8B-B14F-4D97-AF65-F5344CB8AC3E}">
-        <p14:creationId xmlns:p14="http://schemas.microsoft.com/office/powerpoint/2010/main" val="4085566598"/>
+        <p14:creationId xmlns:p14="http://schemas.microsoft.com/office/powerpoint/2010/main" val="389750493"/>
       </p:ext>
     </p:extLst>
   </p:cSld>
@@ -6491,8 +6655,8 @@
           </a:extLst>
         </p:spPr>
       </p:pic>
-      <mc:AlternateContent xmlns:mc="http://schemas.openxmlformats.org/markup-compatibility/2006">
-        <mc:Choice xmlns:a14="http://schemas.microsoft.com/office/drawing/2010/main" Requires="a14">
+      <mc:AlternateContent xmlns:mc="http://schemas.openxmlformats.org/markup-compatibility/2006" xmlns:a14="http://schemas.microsoft.com/office/drawing/2010/main">
+        <mc:Choice Requires="a14">
           <p:sp>
             <p:nvSpPr>
               <p:cNvPr id="5" name="TextBox 4">
@@ -7050,7 +7214,7 @@
             </p:txBody>
           </p:sp>
         </mc:Choice>
-        <mc:Fallback>
+        <mc:Fallback xmlns="">
           <p:sp>
             <p:nvSpPr>
               <p:cNvPr id="5" name="TextBox 4">
@@ -7182,8 +7346,8 @@
               </a:extLst>
             </p:spPr>
           </p:pic>
-          <mc:AlternateContent xmlns:mc="http://schemas.openxmlformats.org/markup-compatibility/2006">
-            <mc:Choice xmlns:a14="http://schemas.microsoft.com/office/drawing/2010/main" Requires="a14">
+          <mc:AlternateContent xmlns:mc="http://schemas.openxmlformats.org/markup-compatibility/2006" xmlns:a14="http://schemas.microsoft.com/office/drawing/2010/main">
+            <mc:Choice Requires="a14">
               <p:sp>
                 <p:nvSpPr>
                   <p:cNvPr id="8" name="TextBox 7">
@@ -7254,7 +7418,7 @@
                 </p:txBody>
               </p:sp>
             </mc:Choice>
-            <mc:Fallback>
+            <mc:Fallback xmlns="">
               <p:sp>
                 <p:nvSpPr>
                   <p:cNvPr id="8" name="TextBox 7">
@@ -7299,8 +7463,8 @@
               </p:sp>
             </mc:Fallback>
           </mc:AlternateContent>
-          <mc:AlternateContent xmlns:mc="http://schemas.openxmlformats.org/markup-compatibility/2006">
-            <mc:Choice xmlns:a14="http://schemas.microsoft.com/office/drawing/2010/main" Requires="a14">
+          <mc:AlternateContent xmlns:mc="http://schemas.openxmlformats.org/markup-compatibility/2006" xmlns:a14="http://schemas.microsoft.com/office/drawing/2010/main">
+            <mc:Choice Requires="a14">
               <p:sp>
                 <p:nvSpPr>
                   <p:cNvPr id="10" name="TextBox 9">
@@ -7371,7 +7535,7 @@
                 </p:txBody>
               </p:sp>
             </mc:Choice>
-            <mc:Fallback>
+            <mc:Fallback xmlns="">
               <p:sp>
                 <p:nvSpPr>
                   <p:cNvPr id="10" name="TextBox 9">
@@ -7622,8 +7786,8 @@
               <a:chExt cx="5015790" cy="763280"/>
             </a:xfrm>
           </p:grpSpPr>
-          <mc:AlternateContent xmlns:mc="http://schemas.openxmlformats.org/markup-compatibility/2006">
-            <mc:Choice xmlns:a14="http://schemas.microsoft.com/office/drawing/2010/main" Requires="a14">
+          <mc:AlternateContent xmlns:mc="http://schemas.openxmlformats.org/markup-compatibility/2006" xmlns:a14="http://schemas.microsoft.com/office/drawing/2010/main">
+            <mc:Choice Requires="a14">
               <p:sp>
                 <p:nvSpPr>
                   <p:cNvPr id="14" name="TextBox 13">
@@ -7681,13 +7845,7 @@
                               <a:rPr lang="en-US" altLang="zh-CN" b="0" i="1" smtClean="0">
                                 <a:latin typeface="Cambria Math" panose="02040503050406030204" pitchFamily="18" charset="0"/>
                               </a:rPr>
-                              <m:t>0</m:t>
-                            </m:r>
-                            <m:r>
-                              <a:rPr lang="en-US" altLang="zh-CN" b="0" i="1" smtClean="0">
-                                <a:latin typeface="Cambria Math" panose="02040503050406030204" pitchFamily="18" charset="0"/>
-                              </a:rPr>
-                              <m:t>0</m:t>
+                              <m:t>00</m:t>
                             </m:r>
                           </m:sub>
                         </m:sSub>
@@ -7700,7 +7858,7 @@
                 </p:txBody>
               </p:sp>
             </mc:Choice>
-            <mc:Fallback>
+            <mc:Fallback xmlns="">
               <p:sp>
                 <p:nvSpPr>
                   <p:cNvPr id="14" name="TextBox 13">
@@ -7801,8 +7959,8 @@
               </a:p>
             </p:txBody>
           </p:sp>
-          <mc:AlternateContent xmlns:mc="http://schemas.openxmlformats.org/markup-compatibility/2006">
-            <mc:Choice xmlns:a14="http://schemas.microsoft.com/office/drawing/2010/main" Requires="a14">
+          <mc:AlternateContent xmlns:mc="http://schemas.openxmlformats.org/markup-compatibility/2006" xmlns:a14="http://schemas.microsoft.com/office/drawing/2010/main">
+            <mc:Choice Requires="a14">
               <p:sp>
                 <p:nvSpPr>
                   <p:cNvPr id="16" name="TextBox 15">
@@ -7860,13 +8018,7 @@
                               <a:rPr lang="en-US" altLang="zh-CN" b="0" i="1" smtClean="0">
                                 <a:latin typeface="Cambria Math" panose="02040503050406030204" pitchFamily="18" charset="0"/>
                               </a:rPr>
-                              <m:t>0</m:t>
-                            </m:r>
-                            <m:r>
-                              <a:rPr lang="en-US" altLang="zh-CN" b="0" i="1" smtClean="0">
-                                <a:latin typeface="Cambria Math" panose="02040503050406030204" pitchFamily="18" charset="0"/>
-                              </a:rPr>
-                              <m:t>1</m:t>
+                              <m:t>01</m:t>
                             </m:r>
                           </m:sub>
                         </m:sSub>
@@ -7879,7 +8031,7 @@
                 </p:txBody>
               </p:sp>
             </mc:Choice>
-            <mc:Fallback>
+            <mc:Fallback xmlns="">
               <p:sp>
                 <p:nvSpPr>
                   <p:cNvPr id="16" name="TextBox 15">
@@ -7980,8 +8132,8 @@
               </a:p>
             </p:txBody>
           </p:sp>
-          <mc:AlternateContent xmlns:mc="http://schemas.openxmlformats.org/markup-compatibility/2006">
-            <mc:Choice xmlns:a14="http://schemas.microsoft.com/office/drawing/2010/main" Requires="a14">
+          <mc:AlternateContent xmlns:mc="http://schemas.openxmlformats.org/markup-compatibility/2006" xmlns:a14="http://schemas.microsoft.com/office/drawing/2010/main">
+            <mc:Choice Requires="a14">
               <p:sp>
                 <p:nvSpPr>
                   <p:cNvPr id="18" name="TextBox 17">
@@ -8039,13 +8191,7 @@
                               <a:rPr lang="en-US" altLang="zh-CN" b="0" i="1" smtClean="0">
                                 <a:latin typeface="Cambria Math" panose="02040503050406030204" pitchFamily="18" charset="0"/>
                               </a:rPr>
-                              <m:t>1</m:t>
-                            </m:r>
-                            <m:r>
-                              <a:rPr lang="en-US" altLang="zh-CN" b="0" i="1" smtClean="0">
-                                <a:latin typeface="Cambria Math" panose="02040503050406030204" pitchFamily="18" charset="0"/>
-                              </a:rPr>
-                              <m:t>0</m:t>
+                              <m:t>10</m:t>
                             </m:r>
                           </m:sub>
                         </m:sSub>
@@ -8058,7 +8204,7 @@
                 </p:txBody>
               </p:sp>
             </mc:Choice>
-            <mc:Fallback>
+            <mc:Fallback xmlns="">
               <p:sp>
                 <p:nvSpPr>
                   <p:cNvPr id="18" name="TextBox 17">
@@ -8159,8 +8305,8 @@
               </a:p>
             </p:txBody>
           </p:sp>
-          <mc:AlternateContent xmlns:mc="http://schemas.openxmlformats.org/markup-compatibility/2006">
-            <mc:Choice xmlns:a14="http://schemas.microsoft.com/office/drawing/2010/main" Requires="a14">
+          <mc:AlternateContent xmlns:mc="http://schemas.openxmlformats.org/markup-compatibility/2006" xmlns:a14="http://schemas.microsoft.com/office/drawing/2010/main">
+            <mc:Choice Requires="a14">
               <p:sp>
                 <p:nvSpPr>
                   <p:cNvPr id="20" name="TextBox 19">
@@ -8231,7 +8377,7 @@
                 </p:txBody>
               </p:sp>
             </mc:Choice>
-            <mc:Fallback>
+            <mc:Fallback xmlns="">
               <p:sp>
                 <p:nvSpPr>
                   <p:cNvPr id="20" name="TextBox 19">
@@ -8794,7 +8940,7 @@
 </file>
 
 <file path=ppt/slides/slide18.xml><?xml version="1.0" encoding="utf-8"?>
-<p:sld xmlns:a="http://schemas.openxmlformats.org/drawingml/2006/main" xmlns:r="http://schemas.openxmlformats.org/officeDocument/2006/relationships" xmlns:p="http://schemas.openxmlformats.org/presentationml/2006/main">
+<p:sld xmlns:a="http://schemas.openxmlformats.org/drawingml/2006/main" xmlns:r="http://schemas.openxmlformats.org/officeDocument/2006/relationships" xmlns:p="http://schemas.openxmlformats.org/presentationml/2006/main" show="0">
   <p:cSld>
     <p:spTree>
       <p:nvGrpSpPr>
@@ -9010,8 +9156,8 @@
           </a:p>
         </p:txBody>
       </p:sp>
-      <mc:AlternateContent xmlns:mc="http://schemas.openxmlformats.org/markup-compatibility/2006">
-        <mc:Choice xmlns:a14="http://schemas.microsoft.com/office/drawing/2010/main" Requires="a14">
+      <mc:AlternateContent xmlns:mc="http://schemas.openxmlformats.org/markup-compatibility/2006" xmlns:a14="http://schemas.microsoft.com/office/drawing/2010/main">
+        <mc:Choice Requires="a14">
           <p:sp>
             <p:nvSpPr>
               <p:cNvPr id="25" name="TextBox 24">
@@ -9999,13 +10145,7 @@
                           <a:rPr lang="en-US" altLang="zh-CN" b="0" i="1" dirty="0" smtClean="0">
                             <a:latin typeface="Cambria Math" panose="02040503050406030204" pitchFamily="18" charset="0"/>
                           </a:rPr>
-                          <m:t>−</m:t>
-                        </m:r>
-                        <m:r>
-                          <a:rPr lang="en-US" altLang="zh-CN" b="0" i="1" dirty="0" smtClean="0">
-                            <a:latin typeface="Cambria Math" panose="02040503050406030204" pitchFamily="18" charset="0"/>
-                          </a:rPr>
-                          <m:t>2</m:t>
+                          <m:t>−2</m:t>
                         </m:r>
                       </m:sup>
                     </m:sSup>
@@ -10046,13 +10186,7 @@
                           <a:rPr lang="en-US" altLang="zh-CN" b="0" i="1" dirty="0" smtClean="0">
                             <a:latin typeface="Cambria Math" panose="02040503050406030204" pitchFamily="18" charset="0"/>
                           </a:rPr>
-                          <m:t>−</m:t>
-                        </m:r>
-                        <m:r>
-                          <a:rPr lang="en-US" altLang="zh-CN" b="0" i="1" dirty="0" smtClean="0">
-                            <a:latin typeface="Cambria Math" panose="02040503050406030204" pitchFamily="18" charset="0"/>
-                          </a:rPr>
-                          <m:t>3</m:t>
+                          <m:t>−3</m:t>
                         </m:r>
                       </m:sup>
                     </m:sSup>
@@ -10689,7 +10823,7 @@
             </p:txBody>
           </p:sp>
         </mc:Choice>
-        <mc:Fallback>
+        <mc:Fallback xmlns="">
           <p:sp>
             <p:nvSpPr>
               <p:cNvPr id="25" name="TextBox 24">
@@ -11017,7 +11151,7 @@
           <p:cNvPr id="2" name="Title 1">
             <a:extLst>
               <a:ext uri="{FF2B5EF4-FFF2-40B4-BE49-F238E27FC236}">
-                <a16:creationId xmlns:a16="http://schemas.microsoft.com/office/drawing/2014/main" id="{009E9FB3-4A93-4CDB-84B7-E950CEB6ECB0}"/>
+                <a16:creationId xmlns:a16="http://schemas.microsoft.com/office/drawing/2014/main" id="{A60A2872-7E2A-B6BD-7CD5-0171252EC0AA}"/>
               </a:ext>
             </a:extLst>
           </p:cNvPr>
@@ -11028,37 +11162,16 @@
             <p:ph type="title"/>
           </p:nvPr>
         </p:nvSpPr>
-        <p:spPr>
-          <a:xfrm>
-            <a:off x="589429" y="1179328"/>
-            <a:ext cx="10971199" cy="1325563"/>
-          </a:xfrm>
-        </p:spPr>
+        <p:spPr/>
         <p:txBody>
           <a:bodyPr/>
           <a:lstStyle/>
           <a:p>
-            <a:pPr algn="ctr"/>
-            <a:r>
-              <a:rPr lang="en-US" dirty="0">
-                <a:latin typeface="Georgia" panose="02040502050405020303" pitchFamily="18" charset="0"/>
-              </a:rPr>
-              <a:t> </a:t>
-            </a:r>
-            <a:r>
-              <a:rPr lang="en-US" dirty="0">
-                <a:solidFill>
-                  <a:srgbClr val="FF0000"/>
-                </a:solidFill>
-                <a:latin typeface="Georgia" panose="02040502050405020303" pitchFamily="18" charset="0"/>
-              </a:rPr>
-              <a:t>(NOT) </a:t>
-            </a:r>
-            <a:r>
-              <a:rPr lang="en-US" dirty="0">
-                <a:latin typeface="Georgia" panose="02040502050405020303" pitchFamily="18" charset="0"/>
-              </a:rPr>
-              <a:t>All Background You Need for This Course</a:t>
+            <a:r>
+              <a:rPr lang="en-US" b="1" dirty="0">
+                <a:latin typeface="Georgia" panose="02040502050405020303" pitchFamily="18" charset="0"/>
+              </a:rPr>
+              <a:t>Example: Shamir Secret Sharing</a:t>
             </a:r>
           </a:p>
         </p:txBody>
@@ -11068,7 +11181,7 @@
           <p:cNvPr id="3" name="Content Placeholder 2">
             <a:extLst>
               <a:ext uri="{FF2B5EF4-FFF2-40B4-BE49-F238E27FC236}">
-                <a16:creationId xmlns:a16="http://schemas.microsoft.com/office/drawing/2014/main" id="{0D89DB11-763D-B154-DFDC-75FE8F315883}"/>
+                <a16:creationId xmlns:a16="http://schemas.microsoft.com/office/drawing/2014/main" id="{F0BA7991-62E9-33BE-7EBF-2C8D68337A34}"/>
               </a:ext>
             </a:extLst>
           </p:cNvPr>
@@ -11079,89 +11192,150 @@
             <p:ph idx="1"/>
           </p:nvPr>
         </p:nvSpPr>
-        <p:spPr>
-          <a:xfrm>
-            <a:off x="889229" y="3072652"/>
-            <a:ext cx="10515600" cy="2403317"/>
-          </a:xfrm>
-        </p:spPr>
+        <p:spPr/>
         <p:txBody>
           <a:bodyPr/>
           <a:lstStyle/>
           <a:p>
-            <a:pPr marL="0" indent="0" algn="ctr">
+            <a:pPr>
+              <a:spcBef>
+                <a:spcPts val="1000"/>
+              </a:spcBef>
+            </a:pPr>
+            <a:r>
+              <a:rPr lang="en-US" sz="2000" b="1" dirty="0">
+                <a:latin typeface="Georgia" panose="02040502050405020303" pitchFamily="18" charset="0"/>
+              </a:rPr>
+              <a:t>Setup: hide the secret in a random polynomial</a:t>
+            </a:r>
+          </a:p>
+          <a:p>
+            <a:pPr lvl="1">
+              <a:spcBef>
+                <a:spcPts val="500"/>
+              </a:spcBef>
+            </a:pPr>
+            <a:r>
+              <a:rPr lang="en-US" sz="1700" dirty="0">
+                <a:latin typeface="Georgia" panose="02040502050405020303" pitchFamily="18" charset="0"/>
+              </a:rPr>
+              <a:t>Secret s = 5, prime p = 11; pick a random slope a = 3, set f(x) = 5 + 3x mod 11</a:t>
+            </a:r>
+          </a:p>
+          <a:p>
+            <a:pPr lvl="1">
+              <a:spcBef>
+                <a:spcPts val="500"/>
+              </a:spcBef>
+            </a:pPr>
+            <a:r>
+              <a:rPr lang="en-US" sz="1700" dirty="0">
+                <a:latin typeface="Georgia" panose="02040502050405020303" pitchFamily="18" charset="0"/>
+              </a:rPr>
+              <a:t>Shares: f(1) = 8, f(2) = 0, f(3) = 3</a:t>
+            </a:r>
+          </a:p>
+          <a:p>
+            <a:pPr>
+              <a:spcBef>
+                <a:spcPts val="1000"/>
+              </a:spcBef>
+            </a:pPr>
+            <a:r>
+              <a:rPr lang="en-US" sz="2000" b="1" dirty="0">
+                <a:latin typeface="Georgia" panose="02040502050405020303" pitchFamily="18" charset="0"/>
+              </a:rPr>
+              <a:t>Any 2 shares recover the secret</a:t>
+            </a:r>
+          </a:p>
+          <a:p>
+            <a:pPr lvl="1">
+              <a:spcBef>
+                <a:spcPts val="500"/>
+              </a:spcBef>
+            </a:pPr>
+            <a:r>
+              <a:rPr lang="en-US" sz="1700" dirty="0">
+                <a:latin typeface="Georgia" panose="02040502050405020303" pitchFamily="18" charset="0"/>
+              </a:rPr>
+              <a:t>Lagrange on (1, 8) and (3, 3): f(0) = 8·7 + 3·5 = 71 = 5 mod 11</a:t>
+            </a:r>
+          </a:p>
+          <a:p>
+            <a:pPr lvl="1">
+              <a:spcBef>
+                <a:spcPts val="500"/>
+              </a:spcBef>
+            </a:pPr>
+            <a:r>
+              <a:rPr lang="en-US" sz="1700" dirty="0">
+                <a:latin typeface="Georgia" panose="02040502050405020303" pitchFamily="18" charset="0"/>
+              </a:rPr>
+              <a:t>Two points determine a line, so the intercept f(0) is unique</a:t>
+            </a:r>
+          </a:p>
+          <a:p>
+            <a:pPr>
+              <a:spcBef>
+                <a:spcPts val="1000"/>
+              </a:spcBef>
+            </a:pPr>
+            <a:r>
+              <a:rPr lang="en-US" sz="2000" b="1" dirty="0">
+                <a:latin typeface="Georgia" panose="02040502050405020303" pitchFamily="18" charset="0"/>
+              </a:rPr>
+              <a:t>Any 1 share reveals nothing</a:t>
+            </a:r>
+          </a:p>
+          <a:p>
+            <a:pPr lvl="1">
+              <a:spcBef>
+                <a:spcPts val="500"/>
+              </a:spcBef>
+            </a:pPr>
+            <a:r>
+              <a:rPr lang="en-US" sz="1700" dirty="0">
+                <a:latin typeface="Georgia" panose="02040502050405020303" pitchFamily="18" charset="0"/>
+              </a:rPr>
+              <a:t>From (2, 0) alone: every candidate s admits exactly one slope with s + 2a = 0</a:t>
+            </a:r>
+          </a:p>
+          <a:p>
+            <a:pPr lvl="1">
+              <a:spcBef>
+                <a:spcPts val="500"/>
+              </a:spcBef>
+            </a:pPr>
+            <a:r>
+              <a:rPr lang="en-US" sz="1700" dirty="0">
+                <a:latin typeface="Georgia" panose="02040502050405020303" pitchFamily="18" charset="0"/>
+              </a:rPr>
+              <a:t>All 11 secrets stay equally likely — perfect privacy, no assumptions needed</a:t>
+            </a:r>
+          </a:p>
+          <a:p>
+            <a:pPr marL="0" indent="0">
+              <a:spcBef>
+                <a:spcPts val="1400"/>
+              </a:spcBef>
               <a:buNone/>
             </a:pPr>
             <a:r>
-              <a:rPr lang="en-US" dirty="0">
-                <a:hlinkClick r:id="rId2"/>
-              </a:rPr>
-              <a:t>https://joyofcryptography.com/pdf/chap0.pdf</a:t>
-            </a:r>
-            <a:endParaRPr lang="en-US" dirty="0"/>
-          </a:p>
-          <a:p>
-            <a:pPr algn="ctr"/>
-            <a:endParaRPr lang="en-US" dirty="0"/>
-          </a:p>
-        </p:txBody>
-      </p:sp>
-      <p:sp>
-        <p:nvSpPr>
-          <p:cNvPr id="4" name="Rectangle 3">
-            <a:extLst>
-              <a:ext uri="{FF2B5EF4-FFF2-40B4-BE49-F238E27FC236}">
-                <a16:creationId xmlns:a16="http://schemas.microsoft.com/office/drawing/2014/main" id="{EB674673-F8CF-B06D-F37D-8924AFAFDC36}"/>
-              </a:ext>
-            </a:extLst>
-          </p:cNvPr>
-          <p:cNvSpPr/>
-          <p:nvPr/>
-        </p:nvSpPr>
-        <p:spPr>
-          <a:xfrm>
-            <a:off x="889229" y="1021278"/>
-            <a:ext cx="1925223" cy="938151"/>
-          </a:xfrm>
-          <a:prstGeom prst="rect">
-            <a:avLst/>
-          </a:prstGeom>
-          <a:solidFill>
-            <a:schemeClr val="bg1"/>
-          </a:solidFill>
-          <a:ln>
-            <a:noFill/>
-          </a:ln>
-        </p:spPr>
-        <p:style>
-          <a:lnRef idx="2">
-            <a:schemeClr val="accent1">
-              <a:shade val="15000"/>
-            </a:schemeClr>
-          </a:lnRef>
-          <a:fillRef idx="1">
-            <a:schemeClr val="accent1"/>
-          </a:fillRef>
-          <a:effectRef idx="0">
-            <a:schemeClr val="accent1"/>
-          </a:effectRef>
-          <a:fontRef idx="minor">
-            <a:schemeClr val="lt1"/>
-          </a:fontRef>
-        </p:style>
-        <p:txBody>
-          <a:bodyPr rtlCol="0" anchor="ctr"/>
-          <a:lstStyle/>
-          <a:p>
-            <a:pPr algn="ctr"/>
-            <a:endParaRPr lang="en-US"/>
+              <a:rPr lang="en-US" sz="1800" b="1" i="1" dirty="0">
+                <a:solidFill>
+                  <a:srgbClr val="C00000"/>
+                </a:solidFill>
+                <a:latin typeface="Georgia" panose="02040502050405020303" pitchFamily="18" charset="0"/>
+              </a:rPr>
+              <a:t>Security comes from counting consistent polynomials — the basis of  MPC.</a:t>
+            </a:r>
           </a:p>
         </p:txBody>
       </p:sp>
     </p:spTree>
     <p:extLst>
       <p:ext uri="{BB962C8B-B14F-4D97-AF65-F5344CB8AC3E}">
-        <p14:creationId xmlns:p14="http://schemas.microsoft.com/office/powerpoint/2010/main" val="3762670942"/>
+        <p14:creationId xmlns:p14="http://schemas.microsoft.com/office/powerpoint/2010/main" val="2056090111"/>
       </p:ext>
     </p:extLst>
   </p:cSld>
@@ -11189,35 +11363,364 @@
                             </p:stCondLst>
                             <p:childTnLst>
                               <p:par>
-                                <p:cTn id="5" presetID="9" presetClass="exit" presetSubtype="0" fill="hold" grpId="0" nodeType="clickEffect">
+                                <p:cTn id="5" presetID="1" presetClass="entr" presetSubtype="0" fill="hold" grpId="0" nodeType="clickEffect">
                                   <p:stCondLst>
                                     <p:cond delay="0"/>
                                   </p:stCondLst>
                                   <p:childTnLst>
-                                    <p:animEffect transition="out" filter="dissolve">
-                                      <p:cBhvr>
-                                        <p:cTn id="6" dur="500"/>
-                                        <p:tgtEl>
-                                          <p:spTgt spid="4"/>
-                                        </p:tgtEl>
-                                      </p:cBhvr>
-                                    </p:animEffect>
                                     <p:set>
                                       <p:cBhvr>
-                                        <p:cTn id="7" dur="1" fill="hold">
+                                        <p:cTn id="6" dur="1" fill="hold">
                                           <p:stCondLst>
-                                            <p:cond delay="499"/>
+                                            <p:cond delay="0"/>
                                           </p:stCondLst>
                                         </p:cTn>
                                         <p:tgtEl>
-                                          <p:spTgt spid="4"/>
+                                          <p:spTgt spid="3">
+                                            <p:txEl>
+                                              <p:pRg st="0" end="0"/>
+                                            </p:txEl>
+                                          </p:spTgt>
                                         </p:tgtEl>
                                         <p:attrNameLst>
                                           <p:attrName>style.visibility</p:attrName>
                                         </p:attrNameLst>
                                       </p:cBhvr>
                                       <p:to>
-                                        <p:strVal val="hidden"/>
+                                        <p:strVal val="visible"/>
+                                      </p:to>
+                                    </p:set>
+                                  </p:childTnLst>
+                                </p:cTn>
+                              </p:par>
+                              <p:par>
+                                <p:cTn id="7" presetID="1" presetClass="entr" presetSubtype="0" fill="hold" grpId="0" nodeType="withEffect">
+                                  <p:stCondLst>
+                                    <p:cond delay="0"/>
+                                  </p:stCondLst>
+                                  <p:childTnLst>
+                                    <p:set>
+                                      <p:cBhvr>
+                                        <p:cTn id="8" dur="1" fill="hold">
+                                          <p:stCondLst>
+                                            <p:cond delay="0"/>
+                                          </p:stCondLst>
+                                        </p:cTn>
+                                        <p:tgtEl>
+                                          <p:spTgt spid="3">
+                                            <p:txEl>
+                                              <p:pRg st="1" end="1"/>
+                                            </p:txEl>
+                                          </p:spTgt>
+                                        </p:tgtEl>
+                                        <p:attrNameLst>
+                                          <p:attrName>style.visibility</p:attrName>
+                                        </p:attrNameLst>
+                                      </p:cBhvr>
+                                      <p:to>
+                                        <p:strVal val="visible"/>
+                                      </p:to>
+                                    </p:set>
+                                  </p:childTnLst>
+                                </p:cTn>
+                              </p:par>
+                              <p:par>
+                                <p:cTn id="9" presetID="1" presetClass="entr" presetSubtype="0" fill="hold" grpId="0" nodeType="withEffect">
+                                  <p:stCondLst>
+                                    <p:cond delay="0"/>
+                                  </p:stCondLst>
+                                  <p:childTnLst>
+                                    <p:set>
+                                      <p:cBhvr>
+                                        <p:cTn id="10" dur="1" fill="hold">
+                                          <p:stCondLst>
+                                            <p:cond delay="0"/>
+                                          </p:stCondLst>
+                                        </p:cTn>
+                                        <p:tgtEl>
+                                          <p:spTgt spid="3">
+                                            <p:txEl>
+                                              <p:pRg st="2" end="2"/>
+                                            </p:txEl>
+                                          </p:spTgt>
+                                        </p:tgtEl>
+                                        <p:attrNameLst>
+                                          <p:attrName>style.visibility</p:attrName>
+                                        </p:attrNameLst>
+                                      </p:cBhvr>
+                                      <p:to>
+                                        <p:strVal val="visible"/>
+                                      </p:to>
+                                    </p:set>
+                                  </p:childTnLst>
+                                </p:cTn>
+                              </p:par>
+                            </p:childTnLst>
+                          </p:cTn>
+                        </p:par>
+                      </p:childTnLst>
+                    </p:cTn>
+                  </p:par>
+                  <p:par>
+                    <p:cTn id="11" fill="hold">
+                      <p:stCondLst>
+                        <p:cond delay="indefinite"/>
+                      </p:stCondLst>
+                      <p:childTnLst>
+                        <p:par>
+                          <p:cTn id="12" fill="hold">
+                            <p:stCondLst>
+                              <p:cond delay="0"/>
+                            </p:stCondLst>
+                            <p:childTnLst>
+                              <p:par>
+                                <p:cTn id="13" presetID="1" presetClass="entr" presetSubtype="0" fill="hold" grpId="0" nodeType="clickEffect">
+                                  <p:stCondLst>
+                                    <p:cond delay="0"/>
+                                  </p:stCondLst>
+                                  <p:childTnLst>
+                                    <p:set>
+                                      <p:cBhvr>
+                                        <p:cTn id="14" dur="1" fill="hold">
+                                          <p:stCondLst>
+                                            <p:cond delay="0"/>
+                                          </p:stCondLst>
+                                        </p:cTn>
+                                        <p:tgtEl>
+                                          <p:spTgt spid="3">
+                                            <p:txEl>
+                                              <p:pRg st="3" end="3"/>
+                                            </p:txEl>
+                                          </p:spTgt>
+                                        </p:tgtEl>
+                                        <p:attrNameLst>
+                                          <p:attrName>style.visibility</p:attrName>
+                                        </p:attrNameLst>
+                                      </p:cBhvr>
+                                      <p:to>
+                                        <p:strVal val="visible"/>
+                                      </p:to>
+                                    </p:set>
+                                  </p:childTnLst>
+                                </p:cTn>
+                              </p:par>
+                              <p:par>
+                                <p:cTn id="15" presetID="1" presetClass="entr" presetSubtype="0" fill="hold" grpId="0" nodeType="withEffect">
+                                  <p:stCondLst>
+                                    <p:cond delay="0"/>
+                                  </p:stCondLst>
+                                  <p:childTnLst>
+                                    <p:set>
+                                      <p:cBhvr>
+                                        <p:cTn id="16" dur="1" fill="hold">
+                                          <p:stCondLst>
+                                            <p:cond delay="0"/>
+                                          </p:stCondLst>
+                                        </p:cTn>
+                                        <p:tgtEl>
+                                          <p:spTgt spid="3">
+                                            <p:txEl>
+                                              <p:pRg st="4" end="4"/>
+                                            </p:txEl>
+                                          </p:spTgt>
+                                        </p:tgtEl>
+                                        <p:attrNameLst>
+                                          <p:attrName>style.visibility</p:attrName>
+                                        </p:attrNameLst>
+                                      </p:cBhvr>
+                                      <p:to>
+                                        <p:strVal val="visible"/>
+                                      </p:to>
+                                    </p:set>
+                                  </p:childTnLst>
+                                </p:cTn>
+                              </p:par>
+                              <p:par>
+                                <p:cTn id="17" presetID="1" presetClass="entr" presetSubtype="0" fill="hold" grpId="0" nodeType="withEffect">
+                                  <p:stCondLst>
+                                    <p:cond delay="0"/>
+                                  </p:stCondLst>
+                                  <p:childTnLst>
+                                    <p:set>
+                                      <p:cBhvr>
+                                        <p:cTn id="18" dur="1" fill="hold">
+                                          <p:stCondLst>
+                                            <p:cond delay="0"/>
+                                          </p:stCondLst>
+                                        </p:cTn>
+                                        <p:tgtEl>
+                                          <p:spTgt spid="3">
+                                            <p:txEl>
+                                              <p:pRg st="5" end="5"/>
+                                            </p:txEl>
+                                          </p:spTgt>
+                                        </p:tgtEl>
+                                        <p:attrNameLst>
+                                          <p:attrName>style.visibility</p:attrName>
+                                        </p:attrNameLst>
+                                      </p:cBhvr>
+                                      <p:to>
+                                        <p:strVal val="visible"/>
+                                      </p:to>
+                                    </p:set>
+                                  </p:childTnLst>
+                                </p:cTn>
+                              </p:par>
+                            </p:childTnLst>
+                          </p:cTn>
+                        </p:par>
+                      </p:childTnLst>
+                    </p:cTn>
+                  </p:par>
+                  <p:par>
+                    <p:cTn id="19" fill="hold">
+                      <p:stCondLst>
+                        <p:cond delay="indefinite"/>
+                      </p:stCondLst>
+                      <p:childTnLst>
+                        <p:par>
+                          <p:cTn id="20" fill="hold">
+                            <p:stCondLst>
+                              <p:cond delay="0"/>
+                            </p:stCondLst>
+                            <p:childTnLst>
+                              <p:par>
+                                <p:cTn id="21" presetID="1" presetClass="entr" presetSubtype="0" fill="hold" grpId="0" nodeType="clickEffect">
+                                  <p:stCondLst>
+                                    <p:cond delay="0"/>
+                                  </p:stCondLst>
+                                  <p:childTnLst>
+                                    <p:set>
+                                      <p:cBhvr>
+                                        <p:cTn id="22" dur="1" fill="hold">
+                                          <p:stCondLst>
+                                            <p:cond delay="0"/>
+                                          </p:stCondLst>
+                                        </p:cTn>
+                                        <p:tgtEl>
+                                          <p:spTgt spid="3">
+                                            <p:txEl>
+                                              <p:pRg st="6" end="6"/>
+                                            </p:txEl>
+                                          </p:spTgt>
+                                        </p:tgtEl>
+                                        <p:attrNameLst>
+                                          <p:attrName>style.visibility</p:attrName>
+                                        </p:attrNameLst>
+                                      </p:cBhvr>
+                                      <p:to>
+                                        <p:strVal val="visible"/>
+                                      </p:to>
+                                    </p:set>
+                                  </p:childTnLst>
+                                </p:cTn>
+                              </p:par>
+                              <p:par>
+                                <p:cTn id="23" presetID="1" presetClass="entr" presetSubtype="0" fill="hold" grpId="0" nodeType="withEffect">
+                                  <p:stCondLst>
+                                    <p:cond delay="0"/>
+                                  </p:stCondLst>
+                                  <p:childTnLst>
+                                    <p:set>
+                                      <p:cBhvr>
+                                        <p:cTn id="24" dur="1" fill="hold">
+                                          <p:stCondLst>
+                                            <p:cond delay="0"/>
+                                          </p:stCondLst>
+                                        </p:cTn>
+                                        <p:tgtEl>
+                                          <p:spTgt spid="3">
+                                            <p:txEl>
+                                              <p:pRg st="7" end="7"/>
+                                            </p:txEl>
+                                          </p:spTgt>
+                                        </p:tgtEl>
+                                        <p:attrNameLst>
+                                          <p:attrName>style.visibility</p:attrName>
+                                        </p:attrNameLst>
+                                      </p:cBhvr>
+                                      <p:to>
+                                        <p:strVal val="visible"/>
+                                      </p:to>
+                                    </p:set>
+                                  </p:childTnLst>
+                                </p:cTn>
+                              </p:par>
+                              <p:par>
+                                <p:cTn id="25" presetID="1" presetClass="entr" presetSubtype="0" fill="hold" grpId="0" nodeType="withEffect">
+                                  <p:stCondLst>
+                                    <p:cond delay="0"/>
+                                  </p:stCondLst>
+                                  <p:childTnLst>
+                                    <p:set>
+                                      <p:cBhvr>
+                                        <p:cTn id="26" dur="1" fill="hold">
+                                          <p:stCondLst>
+                                            <p:cond delay="0"/>
+                                          </p:stCondLst>
+                                        </p:cTn>
+                                        <p:tgtEl>
+                                          <p:spTgt spid="3">
+                                            <p:txEl>
+                                              <p:pRg st="8" end="8"/>
+                                            </p:txEl>
+                                          </p:spTgt>
+                                        </p:tgtEl>
+                                        <p:attrNameLst>
+                                          <p:attrName>style.visibility</p:attrName>
+                                        </p:attrNameLst>
+                                      </p:cBhvr>
+                                      <p:to>
+                                        <p:strVal val="visible"/>
+                                      </p:to>
+                                    </p:set>
+                                  </p:childTnLst>
+                                </p:cTn>
+                              </p:par>
+                            </p:childTnLst>
+                          </p:cTn>
+                        </p:par>
+                      </p:childTnLst>
+                    </p:cTn>
+                  </p:par>
+                  <p:par>
+                    <p:cTn id="27" fill="hold">
+                      <p:stCondLst>
+                        <p:cond delay="indefinite"/>
+                      </p:stCondLst>
+                      <p:childTnLst>
+                        <p:par>
+                          <p:cTn id="28" fill="hold">
+                            <p:stCondLst>
+                              <p:cond delay="0"/>
+                            </p:stCondLst>
+                            <p:childTnLst>
+                              <p:par>
+                                <p:cTn id="29" presetID="1" presetClass="entr" presetSubtype="0" fill="hold" grpId="0" nodeType="clickEffect">
+                                  <p:stCondLst>
+                                    <p:cond delay="0"/>
+                                  </p:stCondLst>
+                                  <p:childTnLst>
+                                    <p:set>
+                                      <p:cBhvr>
+                                        <p:cTn id="30" dur="1" fill="hold">
+                                          <p:stCondLst>
+                                            <p:cond delay="0"/>
+                                          </p:stCondLst>
+                                        </p:cTn>
+                                        <p:tgtEl>
+                                          <p:spTgt spid="3">
+                                            <p:txEl>
+                                              <p:pRg st="9" end="9"/>
+                                            </p:txEl>
+                                          </p:spTgt>
+                                        </p:tgtEl>
+                                        <p:attrNameLst>
+                                          <p:attrName>style.visibility</p:attrName>
+                                        </p:attrNameLst>
+                                      </p:cBhvr>
+                                      <p:to>
+                                        <p:strVal val="visible"/>
                                       </p:to>
                                     </p:set>
                                   </p:childTnLst>
@@ -11251,7 +11754,7 @@
       </p:par>
     </p:tnLst>
     <p:bldLst>
-      <p:bldP spid="4" grpId="0" animBg="1"/>
+      <p:bldP spid="3" grpId="0" build="p"/>
     </p:bldLst>
   </p:timing>
 </p:sld>
@@ -11510,7 +12013,7 @@
               <a:rPr lang="en-US" sz="2400" dirty="0">
                 <a:latin typeface="Georgia" panose="02040502050405020303" pitchFamily="18" charset="0"/>
               </a:rPr>
-              <a:t>Achieve privacy and security in practical setting</a:t>
+              <a:t>Achieve privacy and security in practical settings</a:t>
             </a:r>
           </a:p>
         </p:txBody>
@@ -11585,7 +12088,7 @@
             <a:r>
               <a:rPr lang="en-US" sz="2400" dirty="0">
                 <a:latin typeface="Georgia" panose="02040502050405020303" pitchFamily="18" charset="0"/>
-                <a:hlinkClick r:id="rId2"/>
+                <a:hlinkClick r:id="rId3"/>
               </a:rPr>
               <a:t>https://ning0luo.github.io/</a:t>
             </a:r>
@@ -11609,9 +12112,9 @@
             </a:r>
             <a:r>
               <a:rPr lang="en-US" sz="2400" dirty="0">
-                <a:hlinkClick r:id="rId3"/>
-              </a:rPr>
-              <a:t>zhangyp@illinois.edu</a:t>
+                <a:hlinkClick r:id="rId4"/>
+              </a:rPr>
+              <a:t>nl27@illinois.edu</a:t>
             </a:r>
             <a:endParaRPr lang="en-US" sz="2400" dirty="0"/>
           </a:p>
@@ -11623,7 +12126,7 @@
     </p:spTree>
     <p:extLst>
       <p:ext uri="{BB962C8B-B14F-4D97-AF65-F5344CB8AC3E}">
-        <p14:creationId xmlns:p14="http://schemas.microsoft.com/office/powerpoint/2010/main" val="340618489"/>
+        <p14:creationId xmlns:p14="http://schemas.microsoft.com/office/powerpoint/2010/main" val="2101397019"/>
       </p:ext>
     </p:extLst>
   </p:cSld>
@@ -11634,6 +12137,115 @@
 </file>
 
 <file path=ppt/slides/slide20.xml><?xml version="1.0" encoding="utf-8"?>
+<p:sld xmlns:a="http://schemas.openxmlformats.org/drawingml/2006/main" xmlns:r="http://schemas.openxmlformats.org/officeDocument/2006/relationships" xmlns:p="http://schemas.openxmlformats.org/presentationml/2006/main">
+  <p:cSld>
+    <p:spTree>
+      <p:nvGrpSpPr>
+        <p:cNvPr id="1" name=""/>
+        <p:cNvGrpSpPr/>
+        <p:nvPr/>
+      </p:nvGrpSpPr>
+      <p:grpSpPr>
+        <a:xfrm>
+          <a:off x="0" y="0"/>
+          <a:ext cx="0" cy="0"/>
+          <a:chOff x="0" y="0"/>
+          <a:chExt cx="0" cy="0"/>
+        </a:xfrm>
+      </p:grpSpPr>
+      <p:sp>
+        <p:nvSpPr>
+          <p:cNvPr id="2" name="Title 1">
+            <a:extLst>
+              <a:ext uri="{FF2B5EF4-FFF2-40B4-BE49-F238E27FC236}">
+                <a16:creationId xmlns:a16="http://schemas.microsoft.com/office/drawing/2014/main" id="{009E9FB3-4A93-4CDB-84B7-E950CEB6ECB0}"/>
+              </a:ext>
+            </a:extLst>
+          </p:cNvPr>
+          <p:cNvSpPr>
+            <a:spLocks noGrp="1"/>
+          </p:cNvSpPr>
+          <p:nvPr>
+            <p:ph type="title"/>
+          </p:nvPr>
+        </p:nvSpPr>
+        <p:spPr>
+          <a:xfrm>
+            <a:off x="589429" y="1179328"/>
+            <a:ext cx="10971199" cy="1325563"/>
+          </a:xfrm>
+        </p:spPr>
+        <p:txBody>
+          <a:bodyPr/>
+          <a:lstStyle/>
+          <a:p>
+            <a:pPr algn="ctr"/>
+            <a:r>
+              <a:rPr lang="en-US" dirty="0">
+                <a:latin typeface="Georgia" panose="02040502050405020303" pitchFamily="18" charset="0"/>
+              </a:rPr>
+              <a:t> All Background You Need for This Course</a:t>
+            </a:r>
+          </a:p>
+        </p:txBody>
+      </p:sp>
+      <p:sp>
+        <p:nvSpPr>
+          <p:cNvPr id="3" name="Content Placeholder 2">
+            <a:extLst>
+              <a:ext uri="{FF2B5EF4-FFF2-40B4-BE49-F238E27FC236}">
+                <a16:creationId xmlns:a16="http://schemas.microsoft.com/office/drawing/2014/main" id="{0D89DB11-763D-B154-DFDC-75FE8F315883}"/>
+              </a:ext>
+            </a:extLst>
+          </p:cNvPr>
+          <p:cNvSpPr>
+            <a:spLocks noGrp="1"/>
+          </p:cNvSpPr>
+          <p:nvPr>
+            <p:ph idx="1"/>
+          </p:nvPr>
+        </p:nvSpPr>
+        <p:spPr>
+          <a:xfrm>
+            <a:off x="889229" y="3072652"/>
+            <a:ext cx="10515600" cy="2403317"/>
+          </a:xfrm>
+        </p:spPr>
+        <p:txBody>
+          <a:bodyPr/>
+          <a:lstStyle/>
+          <a:p>
+            <a:pPr marL="0" indent="0" algn="ctr">
+              <a:buNone/>
+            </a:pPr>
+            <a:r>
+              <a:rPr lang="en-US" dirty="0">
+                <a:hlinkClick r:id="rId2"/>
+              </a:rPr>
+              <a:t>https://joyofcryptography.com/pdf/chap0.pdf</a:t>
+            </a:r>
+            <a:endParaRPr lang="en-US" dirty="0"/>
+          </a:p>
+          <a:p>
+            <a:pPr algn="ctr"/>
+            <a:endParaRPr lang="en-US" dirty="0"/>
+          </a:p>
+        </p:txBody>
+      </p:sp>
+    </p:spTree>
+    <p:extLst>
+      <p:ext uri="{BB962C8B-B14F-4D97-AF65-F5344CB8AC3E}">
+        <p14:creationId xmlns:p14="http://schemas.microsoft.com/office/powerpoint/2010/main" val="3762670942"/>
+      </p:ext>
+    </p:extLst>
+  </p:cSld>
+  <p:clrMapOvr>
+    <a:masterClrMapping/>
+  </p:clrMapOvr>
+</p:sld>
+</file>
+
+<file path=ppt/slides/slide21.xml><?xml version="1.0" encoding="utf-8"?>
 <p:sld xmlns:a="http://schemas.openxmlformats.org/drawingml/2006/main" xmlns:r="http://schemas.openxmlformats.org/officeDocument/2006/relationships" xmlns:p="http://schemas.openxmlformats.org/presentationml/2006/main">
   <p:cSld>
     <p:spTree>
@@ -11680,8 +12292,8 @@
           </a:p>
         </p:txBody>
       </p:sp>
-      <mc:AlternateContent xmlns:mc="http://schemas.openxmlformats.org/markup-compatibility/2006">
-        <mc:Choice xmlns:a14="http://schemas.microsoft.com/office/drawing/2010/main" Requires="a14">
+      <mc:AlternateContent xmlns:mc="http://schemas.openxmlformats.org/markup-compatibility/2006" xmlns:a14="http://schemas.microsoft.com/office/drawing/2010/main">
+        <mc:Choice Requires="a14">
           <p:sp>
             <p:nvSpPr>
               <p:cNvPr id="3" name="Content Placeholder 2">
@@ -12366,7 +12978,7 @@
             </p:txBody>
           </p:sp>
         </mc:Choice>
-        <mc:Fallback>
+        <mc:Fallback xmlns="">
           <p:sp>
             <p:nvSpPr>
               <p:cNvPr id="3" name="Content Placeholder 2">
@@ -12419,7 +13031,7 @@
 </p:sld>
 </file>
 
-<file path=ppt/slides/slide21.xml><?xml version="1.0" encoding="utf-8"?>
+<file path=ppt/slides/slide22.xml><?xml version="1.0" encoding="utf-8"?>
 <p:sld xmlns:a="http://schemas.openxmlformats.org/drawingml/2006/main" xmlns:r="http://schemas.openxmlformats.org/officeDocument/2006/relationships" xmlns:p="http://schemas.openxmlformats.org/presentationml/2006/main">
   <p:cSld>
     <p:spTree>
@@ -12925,7 +13537,7 @@
                 <a:buSzPct val="100000"/>
                 <a:defRPr/>
               </a:pPr>
-              <a:t>21</a:t>
+              <a:t>22</a:t>
             </a:fld>
             <a:endParaRPr lang="en-US">
               <a:solidFill>
@@ -13089,7 +13701,7 @@
 </p:sld>
 </file>
 
-<file path=ppt/slides/slide22.xml><?xml version="1.0" encoding="utf-8"?>
+<file path=ppt/slides/slide23.xml><?xml version="1.0" encoding="utf-8"?>
 <p:sld xmlns:a="http://schemas.openxmlformats.org/drawingml/2006/main" xmlns:r="http://schemas.openxmlformats.org/officeDocument/2006/relationships" xmlns:p="http://schemas.openxmlformats.org/presentationml/2006/main">
   <p:cSld>
     <p:spTree>
@@ -13682,7 +14294,7 @@
                 <a:buSzPct val="100000"/>
                 <a:defRPr/>
               </a:pPr>
-              <a:t>22</a:t>
+              <a:t>23</a:t>
             </a:fld>
             <a:endParaRPr lang="en-US">
               <a:solidFill>
@@ -13708,7 +14320,7 @@
 </p:sld>
 </file>
 
-<file path=ppt/slides/slide23.xml><?xml version="1.0" encoding="utf-8"?>
+<file path=ppt/slides/slide24.xml><?xml version="1.0" encoding="utf-8"?>
 <p:sld xmlns:a="http://schemas.openxmlformats.org/drawingml/2006/main" xmlns:r="http://schemas.openxmlformats.org/officeDocument/2006/relationships" xmlns:p="http://schemas.openxmlformats.org/presentationml/2006/main">
   <p:cSld>
     <p:spTree>
@@ -14213,7 +14825,7 @@
 </p:sld>
 </file>
 
-<file path=ppt/slides/slide24.xml><?xml version="1.0" encoding="utf-8"?>
+<file path=ppt/slides/slide25.xml><?xml version="1.0" encoding="utf-8"?>
 <p:sld xmlns:a="http://schemas.openxmlformats.org/drawingml/2006/main" xmlns:r="http://schemas.openxmlformats.org/officeDocument/2006/relationships" xmlns:p="http://schemas.openxmlformats.org/presentationml/2006/main">
   <p:cSld>
     <p:spTree>
@@ -14542,7 +15154,7 @@
 </p:sld>
 </file>
 
-<file path=ppt/slides/slide25.xml><?xml version="1.0" encoding="utf-8"?>
+<file path=ppt/slides/slide26.xml><?xml version="1.0" encoding="utf-8"?>
 <p:sld xmlns:a="http://schemas.openxmlformats.org/drawingml/2006/main" xmlns:r="http://schemas.openxmlformats.org/officeDocument/2006/relationships" xmlns:p="http://schemas.openxmlformats.org/presentationml/2006/main">
   <p:cSld>
     <p:spTree>
@@ -14668,7 +15280,7 @@
       </p:sp>
       <p:pic>
         <p:nvPicPr>
-          <p:cNvPr id="5" name="Picture 4">
+          <p:cNvPr id="5" name="Picture 4" descr="Formal definitions of asymptotic notation. Big-O: f(n) = O(g(n)) if there exist constants c and n0 such that f(n) is at most c times g(n) for all n greater than n0, an upper bound. Big-Omega: f(n) = Omega(g(n)) if f(n) is at least c times g(n) for all large n, a lower bound. Big-Theta: f(n) = Theta(g(n)) if there exist constants c1, c2 and n0 with c1 times g(n) less than f(n) less than c2 times g(n) for all large n, a tight bound.">
             <a:extLst>
               <a:ext uri="{FF2B5EF4-FFF2-40B4-BE49-F238E27FC236}">
                 <a16:creationId xmlns:a16="http://schemas.microsoft.com/office/drawing/2014/main" id="{07EE06FC-526D-F921-9F60-C83718B1A61E}"/>
@@ -14688,7 +15300,7 @@
         </p:blipFill>
         <p:spPr>
           <a:xfrm>
-            <a:off x="2109035" y="2585913"/>
+            <a:off x="2080460" y="2471613"/>
             <a:ext cx="7535707" cy="4272087"/>
           </a:xfrm>
           <a:prstGeom prst="rect">
@@ -14699,7 +15311,7 @@
     </p:spTree>
     <p:extLst>
       <p:ext uri="{BB962C8B-B14F-4D97-AF65-F5344CB8AC3E}">
-        <p14:creationId xmlns:p14="http://schemas.microsoft.com/office/powerpoint/2010/main" val="2202363495"/>
+        <p14:creationId xmlns:p14="http://schemas.microsoft.com/office/powerpoint/2010/main" val="1294777412"/>
       </p:ext>
     </p:extLst>
   </p:cSld>
@@ -14784,7 +15396,7 @@
 </p:sld>
 </file>
 
-<file path=ppt/slides/slide26.xml><?xml version="1.0" encoding="utf-8"?>
+<file path=ppt/slides/slide27.xml><?xml version="1.0" encoding="utf-8"?>
 <p:sld xmlns:a="http://schemas.openxmlformats.org/drawingml/2006/main" xmlns:r="http://schemas.openxmlformats.org/officeDocument/2006/relationships" xmlns:p="http://schemas.openxmlformats.org/presentationml/2006/main">
   <p:cSld>
     <p:spTree>
@@ -14899,7 +15511,7 @@
 </p:sld>
 </file>
 
-<file path=ppt/slides/slide27.xml><?xml version="1.0" encoding="utf-8"?>
+<file path=ppt/slides/slide28.xml><?xml version="1.0" encoding="utf-8"?>
 <p:sld xmlns:a="http://schemas.openxmlformats.org/drawingml/2006/main" xmlns:r="http://schemas.openxmlformats.org/officeDocument/2006/relationships" xmlns:p="http://schemas.openxmlformats.org/presentationml/2006/main">
   <p:cSld>
     <p:spTree>
@@ -15081,7 +15693,7 @@
               <a:blipFill>
                 <a:blip r:embed="rId2"/>
                 <a:stretch>
-                  <a:fillRect t="-2521"/>
+                  <a:fillRect l="-1086" t="-2326"/>
                 </a:stretch>
               </a:blipFill>
             </p:spPr>
@@ -15117,7 +15729,7 @@
               <p:nvPr/>
             </p:nvGraphicFramePr>
             <p:xfrm>
-              <a:off x="8009447" y="2985042"/>
+              <a:off x="8382000" y="1879600"/>
               <a:ext cx="2743200" cy="1854200"/>
             </p:xfrm>
             <a:graphic>
@@ -15460,16 +16072,10 @@
               <p:cNvGraphicFramePr>
                 <a:graphicFrameLocks noGrp="1"/>
               </p:cNvGraphicFramePr>
-              <p:nvPr>
-                <p:extLst>
-                  <p:ext uri="{D42A27DB-BD31-4B8C-83A1-F6EECF244321}">
-                    <p14:modId xmlns:p14="http://schemas.microsoft.com/office/powerpoint/2010/main" val="2276981947"/>
-                  </p:ext>
-                </p:extLst>
-              </p:nvPr>
+              <p:nvPr/>
             </p:nvGraphicFramePr>
             <p:xfrm>
-              <a:off x="8009447" y="2985042"/>
+              <a:off x="8382000" y="1879600"/>
               <a:ext cx="2743200" cy="1854200"/>
             </p:xfrm>
             <a:graphic>
@@ -15514,7 +16120,7 @@
                         <a:blipFill>
                           <a:blip r:embed="rId3"/>
                           <a:stretch>
-                            <a:fillRect l="-667" t="-1639" r="-202000" b="-424590"/>
+                            <a:fillRect l="-1389" t="-3448" r="-202778" b="-431034"/>
                           </a:stretch>
                         </a:blipFill>
                       </a:tcPr>
@@ -15531,7 +16137,7 @@
                         <a:blipFill>
                           <a:blip r:embed="rId3"/>
                           <a:stretch>
-                            <a:fillRect l="-100000" t="-1639" r="-100662" b="-424590"/>
+                            <a:fillRect l="-101389" t="-3448" r="-102778" b="-431034"/>
                           </a:stretch>
                         </a:blipFill>
                       </a:tcPr>
@@ -15548,7 +16154,7 @@
                         <a:blipFill>
                           <a:blip r:embed="rId3"/>
                           <a:stretch>
-                            <a:fillRect l="-201333" t="-1639" r="-1333" b="-424590"/>
+                            <a:fillRect l="-201389" t="-3448" r="-2778" b="-431034"/>
                           </a:stretch>
                         </a:blipFill>
                       </a:tcPr>
@@ -15763,7 +16369,7 @@
       </mc:AlternateContent>
       <p:pic>
         <p:nvPicPr>
-          <p:cNvPr id="6" name="Picture 5">
+          <p:cNvPr id="6" name="Picture 5" descr="Algebraic properties of bitwise XOR: x XOR x equals the all-zero string; x XOR 0 equals x; XOR is commutative, x XOR y equals y XOR x; and XOR is associative, (x XOR y) XOR z equals x XOR (y XOR z).">
             <a:extLst>
               <a:ext uri="{FF2B5EF4-FFF2-40B4-BE49-F238E27FC236}">
                 <a16:creationId xmlns:a16="http://schemas.microsoft.com/office/drawing/2014/main" id="{968970D6-D8AF-2538-07E1-0B90E56597FD}"/>
@@ -15783,8 +16389,8 @@
         </p:blipFill>
         <p:spPr>
           <a:xfrm>
-            <a:off x="250514" y="4369542"/>
-            <a:ext cx="7570674" cy="1854200"/>
+            <a:off x="508000" y="4064000"/>
+            <a:ext cx="9842500" cy="2413000"/>
           </a:xfrm>
           <a:prstGeom prst="rect">
             <a:avLst/>
@@ -15794,7 +16400,7 @@
     </p:spTree>
     <p:extLst>
       <p:ext uri="{BB962C8B-B14F-4D97-AF65-F5344CB8AC3E}">
-        <p14:creationId xmlns:p14="http://schemas.microsoft.com/office/powerpoint/2010/main" val="3530092648"/>
+        <p14:creationId xmlns:p14="http://schemas.microsoft.com/office/powerpoint/2010/main" val="4038275922"/>
       </p:ext>
     </p:extLst>
   </p:cSld>
@@ -15879,7 +16485,7 @@
 </p:sld>
 </file>
 
-<file path=ppt/slides/slide28.xml><?xml version="1.0" encoding="utf-8"?>
+<file path=ppt/slides/slide29.xml><?xml version="1.0" encoding="utf-8"?>
 <p:sld xmlns:a="http://schemas.openxmlformats.org/drawingml/2006/main" xmlns:r="http://schemas.openxmlformats.org/officeDocument/2006/relationships" xmlns:p="http://schemas.openxmlformats.org/presentationml/2006/main">
   <p:cSld>
     <p:spTree>
@@ -15918,8 +16524,8 @@
           </a:p>
         </p:txBody>
       </p:sp>
-      <mc:AlternateContent xmlns:mc="http://schemas.openxmlformats.org/markup-compatibility/2006" xmlns:a14="http://schemas.microsoft.com/office/drawing/2010/main">
-        <mc:Choice Requires="a14">
+      <mc:AlternateContent xmlns:mc="http://schemas.openxmlformats.org/markup-compatibility/2006">
+        <mc:Choice xmlns:a14="http://schemas.microsoft.com/office/drawing/2010/main" Requires="a14">
           <p:sp>
             <p:nvSpPr>
               <p:cNvPr id="3" name="Content Placeholder 2"/>
@@ -16142,7 +16748,7 @@
                 </a:r>
                 <a:r>
                   <a:rPr lang="en-US" dirty="0"/>
-                  <a:t> X, Y are </a:t>
+                  <a:t>  X, Y are </a:t>
                 </a:r>
                 <a:r>
                   <a:rPr lang="en-US" i="1" dirty="0"/>
@@ -16274,7 +16880,7 @@
             </p:txBody>
           </p:sp>
         </mc:Choice>
-        <mc:Fallback xmlns="">
+        <mc:Fallback>
           <p:sp>
             <p:nvSpPr>
               <p:cNvPr id="3" name="Content Placeholder 2"/>
@@ -16289,7 +16895,7 @@
               <a:blipFill>
                 <a:blip r:embed="rId2"/>
                 <a:stretch>
-                  <a:fillRect l="-1043" t="-2521" r="-1681"/>
+                  <a:fillRect l="-1086" t="-2326"/>
                 </a:stretch>
               </a:blipFill>
             </p:spPr>
@@ -16321,7 +16927,235 @@
 </p:sld>
 </file>
 
-<file path=ppt/slides/slide29.xml><?xml version="1.0" encoding="utf-8"?>
+<file path=ppt/slides/slide3.xml><?xml version="1.0" encoding="utf-8"?>
+<p:sld xmlns:a="http://schemas.openxmlformats.org/drawingml/2006/main" xmlns:r="http://schemas.openxmlformats.org/officeDocument/2006/relationships" xmlns:p="http://schemas.openxmlformats.org/presentationml/2006/main">
+  <p:cSld>
+    <p:spTree>
+      <p:nvGrpSpPr>
+        <p:cNvPr id="1" name=""/>
+        <p:cNvGrpSpPr/>
+        <p:nvPr/>
+      </p:nvGrpSpPr>
+      <p:grpSpPr>
+        <a:xfrm>
+          <a:off x="0" y="0"/>
+          <a:ext cx="0" cy="0"/>
+          <a:chOff x="0" y="0"/>
+          <a:chExt cx="0" cy="0"/>
+        </a:xfrm>
+      </p:grpSpPr>
+      <p:sp>
+        <p:nvSpPr>
+          <p:cNvPr id="2" name="Title 1">
+            <a:extLst>
+              <a:ext uri="{FF2B5EF4-FFF2-40B4-BE49-F238E27FC236}">
+                <a16:creationId xmlns:a16="http://schemas.microsoft.com/office/drawing/2014/main" id="{3F6948EE-4A0C-06A9-4D63-B78D50454EA2}"/>
+              </a:ext>
+            </a:extLst>
+          </p:cNvPr>
+          <p:cNvSpPr>
+            <a:spLocks noGrp="1"/>
+          </p:cNvSpPr>
+          <p:nvPr>
+            <p:ph type="title"/>
+          </p:nvPr>
+        </p:nvSpPr>
+        <p:spPr/>
+        <p:txBody>
+          <a:bodyPr/>
+          <a:lstStyle/>
+          <a:p>
+            <a:r>
+              <a:rPr lang="en-US" b="1" dirty="0">
+                <a:latin typeface="Georgia" panose="02040502050405020303" pitchFamily="18" charset="0"/>
+              </a:rPr>
+              <a:t>Course Information</a:t>
+            </a:r>
+          </a:p>
+        </p:txBody>
+      </p:sp>
+      <p:sp>
+        <p:nvSpPr>
+          <p:cNvPr id="3" name="Content Placeholder 2">
+            <a:extLst>
+              <a:ext uri="{FF2B5EF4-FFF2-40B4-BE49-F238E27FC236}">
+                <a16:creationId xmlns:a16="http://schemas.microsoft.com/office/drawing/2014/main" id="{3D30F7B6-FA13-5506-FA1E-A76B285F8638}"/>
+              </a:ext>
+            </a:extLst>
+          </p:cNvPr>
+          <p:cNvSpPr>
+            <a:spLocks noGrp="1"/>
+          </p:cNvSpPr>
+          <p:nvPr>
+            <p:ph idx="1"/>
+          </p:nvPr>
+        </p:nvSpPr>
+        <p:spPr/>
+        <p:txBody>
+          <a:bodyPr>
+            <a:normAutofit/>
+          </a:bodyPr>
+          <a:lstStyle/>
+          <a:p>
+            <a:pPr marL="0" indent="0">
+              <a:buNone/>
+            </a:pPr>
+            <a:r>
+              <a:rPr lang="en-US" b="1" dirty="0">
+                <a:latin typeface="Georgia" panose="02040502050405020303" pitchFamily="18" charset="0"/>
+              </a:rPr>
+              <a:t>Time and Location: </a:t>
+            </a:r>
+          </a:p>
+          <a:p>
+            <a:pPr marL="0" indent="0">
+              <a:buNone/>
+            </a:pPr>
+            <a:r>
+              <a:rPr lang="en-US" dirty="0" err="1">
+                <a:latin typeface="Georgia" panose="02040502050405020303" pitchFamily="18" charset="0"/>
+              </a:rPr>
+              <a:t>TTh</a:t>
+            </a:r>
+            <a:r>
+              <a:rPr lang="en-US" dirty="0">
+                <a:latin typeface="Georgia" panose="02040502050405020303" pitchFamily="18" charset="0"/>
+              </a:rPr>
+              <a:t> 5:00-6:20 pm, ECEB 3013</a:t>
+            </a:r>
+          </a:p>
+          <a:p>
+            <a:pPr marL="0" indent="0">
+              <a:buNone/>
+            </a:pPr>
+            <a:r>
+              <a:rPr lang="en-US" b="1" dirty="0">
+                <a:latin typeface="Georgia" panose="02040502050405020303" pitchFamily="18" charset="0"/>
+              </a:rPr>
+              <a:t>My office hour: </a:t>
+            </a:r>
+            <a:r>
+              <a:rPr lang="en-US" altLang="zh-CN" dirty="0">
+                <a:latin typeface="Georgia" panose="02040502050405020303" pitchFamily="18" charset="0"/>
+              </a:rPr>
+              <a:t>Upon on request</a:t>
+            </a:r>
+            <a:endParaRPr lang="en-US" dirty="0">
+              <a:latin typeface="Georgia" panose="02040502050405020303" pitchFamily="18" charset="0"/>
+            </a:endParaRPr>
+          </a:p>
+          <a:p>
+            <a:pPr marL="0" indent="0">
+              <a:buNone/>
+            </a:pPr>
+            <a:endParaRPr lang="en-US" dirty="0">
+              <a:latin typeface="Georgia" panose="02040502050405020303" pitchFamily="18" charset="0"/>
+            </a:endParaRPr>
+          </a:p>
+          <a:p>
+            <a:pPr marL="0" indent="0">
+              <a:buNone/>
+            </a:pPr>
+            <a:r>
+              <a:rPr lang="en-US" b="1" dirty="0">
+                <a:latin typeface="Georgia" panose="02040502050405020303" pitchFamily="18" charset="0"/>
+              </a:rPr>
+              <a:t>TA:</a:t>
+            </a:r>
+            <a:r>
+              <a:rPr lang="en-US" dirty="0">
+                <a:latin typeface="Georgia" panose="02040502050405020303" pitchFamily="18" charset="0"/>
+              </a:rPr>
+              <a:t> </a:t>
+            </a:r>
+            <a:r>
+              <a:rPr lang="en-US" altLang="zh-CN" dirty="0">
+                <a:latin typeface="Georgia" panose="02040502050405020303" pitchFamily="18" charset="0"/>
+              </a:rPr>
+              <a:t> Pranav Rajpal</a:t>
+            </a:r>
+            <a:r>
+              <a:rPr lang="zh-CN" altLang="en-US" dirty="0">
+                <a:latin typeface="Georgia" panose="02040502050405020303" pitchFamily="18" charset="0"/>
+              </a:rPr>
+              <a:t> </a:t>
+            </a:r>
+            <a:endParaRPr lang="en-US" dirty="0">
+              <a:latin typeface="Georgia" panose="02040502050405020303" pitchFamily="18" charset="0"/>
+            </a:endParaRPr>
+          </a:p>
+          <a:p>
+            <a:pPr marL="0" indent="0">
+              <a:buNone/>
+            </a:pPr>
+            <a:r>
+              <a:rPr lang="en-US" dirty="0">
+                <a:latin typeface="Georgia" panose="02040502050405020303" pitchFamily="18" charset="0"/>
+              </a:rPr>
+              <a:t>Office hour:</a:t>
+            </a:r>
+            <a:r>
+              <a:rPr lang="zh-CN" altLang="en-US" dirty="0">
+                <a:solidFill>
+                  <a:srgbClr val="000000"/>
+                </a:solidFill>
+                <a:latin typeface="Georgia" panose="02040502050405020303" pitchFamily="18" charset="0"/>
+              </a:rPr>
+              <a:t> </a:t>
+            </a:r>
+            <a:r>
+              <a:rPr lang="en-US" altLang="zh-CN" dirty="0">
+                <a:solidFill>
+                  <a:srgbClr val="000000"/>
+                </a:solidFill>
+                <a:latin typeface="Georgia" panose="02040502050405020303" pitchFamily="18" charset="0"/>
+              </a:rPr>
+              <a:t>TBD</a:t>
+            </a:r>
+            <a:r>
+              <a:rPr lang="en-US" dirty="0">
+                <a:latin typeface="Georgia" panose="02040502050405020303" pitchFamily="18" charset="0"/>
+              </a:rPr>
+              <a:t> </a:t>
+            </a:r>
+          </a:p>
+          <a:p>
+            <a:pPr marL="0" indent="0">
+              <a:buNone/>
+            </a:pPr>
+            <a:endParaRPr lang="en-US" dirty="0">
+              <a:latin typeface="Georgia" panose="02040502050405020303" pitchFamily="18" charset="0"/>
+            </a:endParaRPr>
+          </a:p>
+          <a:p>
+            <a:pPr marL="0" indent="0">
+              <a:buNone/>
+            </a:pPr>
+            <a:endParaRPr lang="en-US" dirty="0">
+              <a:latin typeface="Georgia" panose="02040502050405020303" pitchFamily="18" charset="0"/>
+            </a:endParaRPr>
+          </a:p>
+          <a:p>
+            <a:endParaRPr lang="en-US" dirty="0">
+              <a:latin typeface="Georgia" panose="02040502050405020303" pitchFamily="18" charset="0"/>
+            </a:endParaRPr>
+          </a:p>
+        </p:txBody>
+      </p:sp>
+    </p:spTree>
+    <p:extLst>
+      <p:ext uri="{BB962C8B-B14F-4D97-AF65-F5344CB8AC3E}">
+        <p14:creationId xmlns:p14="http://schemas.microsoft.com/office/powerpoint/2010/main" val="1555687569"/>
+      </p:ext>
+    </p:extLst>
+  </p:cSld>
+  <p:clrMapOvr>
+    <a:masterClrMapping/>
+  </p:clrMapOvr>
+</p:sld>
+</file>
+
+<file path=ppt/slides/slide30.xml><?xml version="1.0" encoding="utf-8"?>
 <p:sld xmlns:a="http://schemas.openxmlformats.org/drawingml/2006/main" xmlns:r="http://schemas.openxmlformats.org/officeDocument/2006/relationships" xmlns:p="http://schemas.openxmlformats.org/presentationml/2006/main">
   <p:cSld>
     <p:spTree>
@@ -16360,8 +17194,8 @@
           </a:p>
         </p:txBody>
       </p:sp>
-      <mc:AlternateContent xmlns:mc="http://schemas.openxmlformats.org/markup-compatibility/2006">
-        <mc:Choice xmlns:a14="http://schemas.microsoft.com/office/drawing/2010/main" Requires="a14">
+      <mc:AlternateContent xmlns:mc="http://schemas.openxmlformats.org/markup-compatibility/2006" xmlns:a14="http://schemas.microsoft.com/office/drawing/2010/main">
+        <mc:Choice Requires="a14">
           <p:sp>
             <p:nvSpPr>
               <p:cNvPr id="3" name="Content Placeholder 2"/>
@@ -16796,7 +17630,7 @@
             </p:txBody>
           </p:sp>
         </mc:Choice>
-        <mc:Fallback>
+        <mc:Fallback xmlns="">
           <p:sp>
             <p:nvSpPr>
               <p:cNvPr id="3" name="Content Placeholder 2"/>
@@ -16834,259 +17668,6 @@
     <p:extLst>
       <p:ext uri="{BB962C8B-B14F-4D97-AF65-F5344CB8AC3E}">
         <p14:creationId xmlns:p14="http://schemas.microsoft.com/office/powerpoint/2010/main" val="3886691629"/>
-      </p:ext>
-    </p:extLst>
-  </p:cSld>
-  <p:clrMapOvr>
-    <a:masterClrMapping/>
-  </p:clrMapOvr>
-</p:sld>
-</file>
-
-<file path=ppt/slides/slide3.xml><?xml version="1.0" encoding="utf-8"?>
-<p:sld xmlns:a="http://schemas.openxmlformats.org/drawingml/2006/main" xmlns:r="http://schemas.openxmlformats.org/officeDocument/2006/relationships" xmlns:p="http://schemas.openxmlformats.org/presentationml/2006/main">
-  <p:cSld>
-    <p:spTree>
-      <p:nvGrpSpPr>
-        <p:cNvPr id="1" name=""/>
-        <p:cNvGrpSpPr/>
-        <p:nvPr/>
-      </p:nvGrpSpPr>
-      <p:grpSpPr>
-        <a:xfrm>
-          <a:off x="0" y="0"/>
-          <a:ext cx="0" cy="0"/>
-          <a:chOff x="0" y="0"/>
-          <a:chExt cx="0" cy="0"/>
-        </a:xfrm>
-      </p:grpSpPr>
-      <p:sp>
-        <p:nvSpPr>
-          <p:cNvPr id="2" name="Title 1">
-            <a:extLst>
-              <a:ext uri="{FF2B5EF4-FFF2-40B4-BE49-F238E27FC236}">
-                <a16:creationId xmlns:a16="http://schemas.microsoft.com/office/drawing/2014/main" id="{3F6948EE-4A0C-06A9-4D63-B78D50454EA2}"/>
-              </a:ext>
-            </a:extLst>
-          </p:cNvPr>
-          <p:cNvSpPr>
-            <a:spLocks noGrp="1"/>
-          </p:cNvSpPr>
-          <p:nvPr>
-            <p:ph type="title"/>
-          </p:nvPr>
-        </p:nvSpPr>
-        <p:spPr/>
-        <p:txBody>
-          <a:bodyPr/>
-          <a:lstStyle/>
-          <a:p>
-            <a:r>
-              <a:rPr lang="en-US" b="1" dirty="0">
-                <a:latin typeface="Georgia" panose="02040502050405020303" pitchFamily="18" charset="0"/>
-              </a:rPr>
-              <a:t>Course Information</a:t>
-            </a:r>
-          </a:p>
-        </p:txBody>
-      </p:sp>
-      <p:sp>
-        <p:nvSpPr>
-          <p:cNvPr id="3" name="Content Placeholder 2">
-            <a:extLst>
-              <a:ext uri="{FF2B5EF4-FFF2-40B4-BE49-F238E27FC236}">
-                <a16:creationId xmlns:a16="http://schemas.microsoft.com/office/drawing/2014/main" id="{3D30F7B6-FA13-5506-FA1E-A76B285F8638}"/>
-              </a:ext>
-            </a:extLst>
-          </p:cNvPr>
-          <p:cNvSpPr>
-            <a:spLocks noGrp="1"/>
-          </p:cNvSpPr>
-          <p:nvPr>
-            <p:ph idx="1"/>
-          </p:nvPr>
-        </p:nvSpPr>
-        <p:spPr/>
-        <p:txBody>
-          <a:bodyPr>
-            <a:normAutofit/>
-          </a:bodyPr>
-          <a:lstStyle/>
-          <a:p>
-            <a:pPr marL="0" indent="0">
-              <a:buNone/>
-            </a:pPr>
-            <a:r>
-              <a:rPr lang="en-US" b="1" dirty="0">
-                <a:latin typeface="Georgia" panose="02040502050405020303" pitchFamily="18" charset="0"/>
-              </a:rPr>
-              <a:t>Time and Location: </a:t>
-            </a:r>
-          </a:p>
-          <a:p>
-            <a:pPr marL="0" indent="0">
-              <a:buNone/>
-            </a:pPr>
-            <a:r>
-              <a:rPr lang="en-US" dirty="0" err="1">
-                <a:latin typeface="Georgia" panose="02040502050405020303" pitchFamily="18" charset="0"/>
-              </a:rPr>
-              <a:t>TuTh</a:t>
-            </a:r>
-            <a:r>
-              <a:rPr lang="en-US" dirty="0">
-                <a:latin typeface="Georgia" panose="02040502050405020303" pitchFamily="18" charset="0"/>
-              </a:rPr>
-              <a:t> 5:00-6:20 pm, ECEB 1013</a:t>
-            </a:r>
-          </a:p>
-          <a:p>
-            <a:pPr marL="0" indent="0">
-              <a:buNone/>
-            </a:pPr>
-            <a:r>
-              <a:rPr lang="en-US" b="1" dirty="0">
-                <a:latin typeface="Georgia" panose="02040502050405020303" pitchFamily="18" charset="0"/>
-              </a:rPr>
-              <a:t>My office hour: </a:t>
-            </a:r>
-            <a:r>
-              <a:rPr lang="en-US" altLang="zh-CN" dirty="0">
-                <a:latin typeface="Georgia" panose="02040502050405020303" pitchFamily="18" charset="0"/>
-              </a:rPr>
-              <a:t>TBD</a:t>
-            </a:r>
-            <a:endParaRPr lang="en-US" dirty="0">
-              <a:latin typeface="Georgia" panose="02040502050405020303" pitchFamily="18" charset="0"/>
-            </a:endParaRPr>
-          </a:p>
-          <a:p>
-            <a:pPr marL="0" indent="0">
-              <a:buNone/>
-            </a:pPr>
-            <a:endParaRPr lang="en-US" dirty="0">
-              <a:latin typeface="Georgia" panose="02040502050405020303" pitchFamily="18" charset="0"/>
-            </a:endParaRPr>
-          </a:p>
-          <a:p>
-            <a:pPr marL="0" indent="0">
-              <a:buNone/>
-            </a:pPr>
-            <a:r>
-              <a:rPr lang="en-US" b="1" dirty="0">
-                <a:latin typeface="Georgia" panose="02040502050405020303" pitchFamily="18" charset="0"/>
-              </a:rPr>
-              <a:t>TA:</a:t>
-            </a:r>
-            <a:r>
-              <a:rPr lang="en-US" dirty="0">
-                <a:latin typeface="Georgia" panose="02040502050405020303" pitchFamily="18" charset="0"/>
-              </a:rPr>
-              <a:t> </a:t>
-            </a:r>
-            <a:r>
-              <a:rPr lang="en-US" altLang="zh-CN" dirty="0" err="1">
-                <a:latin typeface="Georgia" panose="02040502050405020303" pitchFamily="18" charset="0"/>
-              </a:rPr>
-              <a:t>Tianyi</a:t>
-            </a:r>
-            <a:r>
-              <a:rPr lang="zh-CN" altLang="en-US" dirty="0">
-                <a:latin typeface="Georgia" panose="02040502050405020303" pitchFamily="18" charset="0"/>
-              </a:rPr>
-              <a:t> </a:t>
-            </a:r>
-            <a:r>
-              <a:rPr lang="en-US" altLang="zh-CN" dirty="0">
-                <a:latin typeface="Georgia" panose="02040502050405020303" pitchFamily="18" charset="0"/>
-              </a:rPr>
-              <a:t>Liu</a:t>
-            </a:r>
-            <a:r>
-              <a:rPr lang="en-US" dirty="0">
-                <a:latin typeface="Georgia" panose="02040502050405020303" pitchFamily="18" charset="0"/>
-              </a:rPr>
-              <a:t>, </a:t>
-            </a:r>
-            <a:r>
-              <a:rPr lang="zh-CN" altLang="en-US" dirty="0">
-                <a:latin typeface="Georgia" panose="02040502050405020303" pitchFamily="18" charset="0"/>
-              </a:rPr>
-              <a:t> </a:t>
-            </a:r>
-            <a:r>
-              <a:rPr lang="en-US" dirty="0">
-                <a:latin typeface="Georgia" panose="02040502050405020303" pitchFamily="18" charset="0"/>
-                <a:hlinkClick r:id="rId2"/>
-              </a:rPr>
-              <a:t>tianyi.liu.08@gmail.co</a:t>
-            </a:r>
-            <a:endParaRPr lang="en-US" dirty="0">
-              <a:latin typeface="Georgia" panose="02040502050405020303" pitchFamily="18" charset="0"/>
-            </a:endParaRPr>
-          </a:p>
-          <a:p>
-            <a:pPr marL="0" indent="0">
-              <a:buNone/>
-            </a:pPr>
-            <a:r>
-              <a:rPr lang="en-US" dirty="0">
-                <a:latin typeface="Georgia" panose="02040502050405020303" pitchFamily="18" charset="0"/>
-              </a:rPr>
-              <a:t>Office hour:</a:t>
-            </a:r>
-            <a:r>
-              <a:rPr lang="zh-CN" altLang="en-US" dirty="0">
-                <a:solidFill>
-                  <a:srgbClr val="000000"/>
-                </a:solidFill>
-                <a:latin typeface="Georgia" panose="02040502050405020303" pitchFamily="18" charset="0"/>
-              </a:rPr>
-              <a:t> </a:t>
-            </a:r>
-            <a:r>
-              <a:rPr lang="en-US" altLang="zh-CN" dirty="0">
-                <a:solidFill>
-                  <a:srgbClr val="000000"/>
-                </a:solidFill>
-                <a:latin typeface="Georgia" panose="02040502050405020303" pitchFamily="18" charset="0"/>
-              </a:rPr>
-              <a:t>TBD</a:t>
-            </a:r>
-            <a:r>
-              <a:rPr lang="en-US" dirty="0">
-                <a:latin typeface="Georgia" panose="02040502050405020303" pitchFamily="18" charset="0"/>
-              </a:rPr>
-              <a:t> </a:t>
-            </a:r>
-          </a:p>
-          <a:p>
-            <a:pPr marL="0" indent="0">
-              <a:buNone/>
-            </a:pPr>
-            <a:endParaRPr lang="en-US" dirty="0">
-              <a:latin typeface="Georgia" panose="02040502050405020303" pitchFamily="18" charset="0"/>
-            </a:endParaRPr>
-          </a:p>
-          <a:p>
-            <a:pPr marL="0" indent="0">
-              <a:buNone/>
-            </a:pPr>
-            <a:endParaRPr lang="en-US" dirty="0">
-              <a:latin typeface="Georgia" panose="02040502050405020303" pitchFamily="18" charset="0"/>
-            </a:endParaRPr>
-          </a:p>
-          <a:p>
-            <a:endParaRPr lang="en-US" dirty="0">
-              <a:latin typeface="Georgia" panose="02040502050405020303" pitchFamily="18" charset="0"/>
-            </a:endParaRPr>
-          </a:p>
-        </p:txBody>
-      </p:sp>
-    </p:spTree>
-    <p:extLst>
-      <p:ext uri="{BB962C8B-B14F-4D97-AF65-F5344CB8AC3E}">
-        <p14:creationId xmlns:p14="http://schemas.microsoft.com/office/powerpoint/2010/main" val="1381734140"/>
       </p:ext>
     </p:extLst>
   </p:cSld>
@@ -17177,32 +17758,17 @@
           <a:lstStyle/>
           <a:p>
             <a:r>
-              <a:rPr lang="en-US" b="1" dirty="0" err="1">
+              <a:rPr lang="en-US" b="1" dirty="0">
                 <a:latin typeface="Georgia" panose="02040502050405020303" pitchFamily="18" charset="0"/>
               </a:rPr>
               <a:t>Webpage</a:t>
             </a:r>
             <a:r>
-              <a:rPr lang="en-US" dirty="0" err="1">
-                <a:latin typeface="Georgia" panose="02040502050405020303" pitchFamily="18" charset="0"/>
-              </a:rPr>
-              <a:t>:https</a:t>
-            </a:r>
-            <a:r>
               <a:rPr lang="en-US" dirty="0">
                 <a:latin typeface="Georgia" panose="02040502050405020303" pitchFamily="18" charset="0"/>
               </a:rPr>
-              <a:t>://ning0luo.github.io/ece407/</a:t>
-            </a:r>
-            <a:r>
-              <a:rPr lang="en-US" dirty="0" err="1">
-                <a:latin typeface="Georgia" panose="02040502050405020303" pitchFamily="18" charset="0"/>
-              </a:rPr>
-              <a:t>index.html</a:t>
-            </a:r>
-            <a:endParaRPr lang="en-US" dirty="0">
-              <a:latin typeface="Georgia" panose="02040502050405020303" pitchFamily="18" charset="0"/>
-            </a:endParaRPr>
+              <a:t>:</a:t>
+            </a:r>
           </a:p>
           <a:p>
             <a:pPr marL="0" indent="0">
@@ -17228,9 +17794,9 @@
             <a:r>
               <a:rPr lang="en-US" dirty="0">
                 <a:latin typeface="Georgia" panose="02040502050405020303" pitchFamily="18" charset="0"/>
-                <a:hlinkClick r:id="rId2"/>
-              </a:rPr>
-              <a:t>https://canvas.illinois.edu/</a:t>
+                <a:hlinkClick r:id="rId3"/>
+              </a:rPr>
+              <a:t>https://courses.grainger.illinois.edu/ece407/fa2026/</a:t>
             </a:r>
             <a:endParaRPr lang="en-US" dirty="0">
               <a:latin typeface="Georgia" panose="02040502050405020303" pitchFamily="18" charset="0"/>
@@ -17242,7 +17808,7 @@
               <a:rPr lang="en-US" dirty="0">
                 <a:latin typeface="Georgia" panose="02040502050405020303" pitchFamily="18" charset="0"/>
               </a:rPr>
-              <a:t>Slides and files</a:t>
+              <a:t> Slides and files</a:t>
             </a:r>
           </a:p>
           <a:p>
@@ -17324,6 +17890,19 @@
           <a:p>
             <a:pPr lvl="1"/>
             <a:r>
+              <a:rPr lang="en-US" altLang="zh-CN" dirty="0">
+                <a:latin typeface="Georgia" panose="02040502050405020303" pitchFamily="18" charset="0"/>
+                <a:hlinkClick r:id="rId4"/>
+              </a:rPr>
+              <a:t>https://piazza.com/illinois/fall2026/csece407</a:t>
+            </a:r>
+            <a:endParaRPr lang="en-US" altLang="zh-CN" dirty="0">
+              <a:latin typeface="Georgia" panose="02040502050405020303" pitchFamily="18" charset="0"/>
+            </a:endParaRPr>
+          </a:p>
+          <a:p>
+            <a:pPr lvl="1"/>
+            <a:r>
               <a:rPr lang="en-US" dirty="0">
                 <a:latin typeface="Georgia" panose="02040502050405020303" pitchFamily="18" charset="0"/>
               </a:rPr>
@@ -17473,22 +18052,6 @@
               </a:rPr>
               <a:t>you!</a:t>
             </a:r>
-            <a:r>
-              <a:rPr lang="zh-CN" altLang="en-US" dirty="0">
-                <a:latin typeface="Georgia" panose="02040502050405020303" pitchFamily="18" charset="0"/>
-              </a:rPr>
-              <a:t> </a:t>
-            </a:r>
-            <a:r>
-              <a:rPr lang="en-US" altLang="zh-CN" dirty="0">
-                <a:latin typeface="Georgia" panose="02040502050405020303" pitchFamily="18" charset="0"/>
-                <a:hlinkClick r:id="rId3"/>
-              </a:rPr>
-              <a:t>https://piazza.com/illinois/fall2025/c93b</a:t>
-            </a:r>
-            <a:endParaRPr lang="en-US" altLang="zh-CN" dirty="0">
-              <a:latin typeface="Georgia" panose="02040502050405020303" pitchFamily="18" charset="0"/>
-            </a:endParaRPr>
           </a:p>
           <a:p>
             <a:pPr lvl="1"/>
@@ -17501,195 +18064,19 @@
             <a:endParaRPr lang="en-US" dirty="0">
               <a:latin typeface="Georgia" panose="02040502050405020303" pitchFamily="18" charset="0"/>
             </a:endParaRPr>
-          </a:p>
-        </p:txBody>
-      </p:sp>
-      <p:sp>
-        <p:nvSpPr>
-          <p:cNvPr id="4" name="Rectangle 3">
-            <a:extLst>
-              <a:ext uri="{FF2B5EF4-FFF2-40B4-BE49-F238E27FC236}">
-                <a16:creationId xmlns:a16="http://schemas.microsoft.com/office/drawing/2014/main" id="{1E151538-5B12-F7E3-6A09-8EDD10E5FB92}"/>
-              </a:ext>
-            </a:extLst>
-          </p:cNvPr>
-          <p:cNvSpPr/>
-          <p:nvPr/>
-        </p:nvSpPr>
-        <p:spPr>
-          <a:xfrm>
-            <a:off x="629392" y="5326083"/>
-            <a:ext cx="7226135" cy="855023"/>
-          </a:xfrm>
-          <a:prstGeom prst="rect">
-            <a:avLst/>
-          </a:prstGeom>
-          <a:solidFill>
-            <a:schemeClr val="bg1"/>
-          </a:solidFill>
-          <a:ln>
-            <a:noFill/>
-          </a:ln>
-        </p:spPr>
-        <p:style>
-          <a:lnRef idx="2">
-            <a:schemeClr val="accent1">
-              <a:shade val="15000"/>
-            </a:schemeClr>
-          </a:lnRef>
-          <a:fillRef idx="1">
-            <a:schemeClr val="accent1"/>
-          </a:fillRef>
-          <a:effectRef idx="0">
-            <a:schemeClr val="accent1"/>
-          </a:effectRef>
-          <a:fontRef idx="minor">
-            <a:schemeClr val="lt1"/>
-          </a:fontRef>
-        </p:style>
-        <p:txBody>
-          <a:bodyPr rtlCol="0" anchor="ctr"/>
-          <a:lstStyle/>
-          <a:p>
-            <a:pPr algn="ctr"/>
-            <a:endParaRPr lang="en-US"/>
           </a:p>
         </p:txBody>
       </p:sp>
     </p:spTree>
     <p:extLst>
       <p:ext uri="{BB962C8B-B14F-4D97-AF65-F5344CB8AC3E}">
-        <p14:creationId xmlns:p14="http://schemas.microsoft.com/office/powerpoint/2010/main" val="2260103426"/>
+        <p14:creationId xmlns:p14="http://schemas.microsoft.com/office/powerpoint/2010/main" val="2788530701"/>
       </p:ext>
     </p:extLst>
   </p:cSld>
   <p:clrMapOvr>
     <a:masterClrMapping/>
   </p:clrMapOvr>
-  <p:timing>
-    <p:tnLst>
-      <p:par>
-        <p:cTn id="1" dur="indefinite" restart="never" nodeType="tmRoot">
-          <p:childTnLst>
-            <p:seq concurrent="1" nextAc="seek">
-              <p:cTn id="2" dur="indefinite" nodeType="mainSeq">
-                <p:childTnLst>
-                  <p:par>
-                    <p:cTn id="3" fill="hold">
-                      <p:stCondLst>
-                        <p:cond delay="indefinite"/>
-                      </p:stCondLst>
-                      <p:childTnLst>
-                        <p:par>
-                          <p:cTn id="4" fill="hold">
-                            <p:stCondLst>
-                              <p:cond delay="0"/>
-                            </p:stCondLst>
-                            <p:childTnLst>
-                              <p:par>
-                                <p:cTn id="5" presetID="2" presetClass="exit" presetSubtype="4" fill="hold" grpId="0" nodeType="clickEffect">
-                                  <p:stCondLst>
-                                    <p:cond delay="0"/>
-                                  </p:stCondLst>
-                                  <p:childTnLst>
-                                    <p:anim calcmode="lin" valueType="num">
-                                      <p:cBhvr additive="base">
-                                        <p:cTn id="6" dur="500"/>
-                                        <p:tgtEl>
-                                          <p:spTgt spid="4"/>
-                                        </p:tgtEl>
-                                        <p:attrNameLst>
-                                          <p:attrName>ppt_x</p:attrName>
-                                        </p:attrNameLst>
-                                      </p:cBhvr>
-                                      <p:tavLst>
-                                        <p:tav tm="0">
-                                          <p:val>
-                                            <p:strVal val="ppt_x"/>
-                                          </p:val>
-                                        </p:tav>
-                                        <p:tav tm="100000">
-                                          <p:val>
-                                            <p:strVal val="ppt_x"/>
-                                          </p:val>
-                                        </p:tav>
-                                      </p:tavLst>
-                                    </p:anim>
-                                    <p:anim calcmode="lin" valueType="num">
-                                      <p:cBhvr additive="base">
-                                        <p:cTn id="7" dur="500"/>
-                                        <p:tgtEl>
-                                          <p:spTgt spid="4"/>
-                                        </p:tgtEl>
-                                        <p:attrNameLst>
-                                          <p:attrName>ppt_y</p:attrName>
-                                        </p:attrNameLst>
-                                      </p:cBhvr>
-                                      <p:tavLst>
-                                        <p:tav tm="0">
-                                          <p:val>
-                                            <p:strVal val="ppt_y"/>
-                                          </p:val>
-                                        </p:tav>
-                                        <p:tav tm="100000">
-                                          <p:val>
-                                            <p:strVal val="1+ppt_h/2"/>
-                                          </p:val>
-                                        </p:tav>
-                                      </p:tavLst>
-                                    </p:anim>
-                                    <p:set>
-                                      <p:cBhvr>
-                                        <p:cTn id="8" dur="1" fill="hold">
-                                          <p:stCondLst>
-                                            <p:cond delay="499"/>
-                                          </p:stCondLst>
-                                        </p:cTn>
-                                        <p:tgtEl>
-                                          <p:spTgt spid="4"/>
-                                        </p:tgtEl>
-                                        <p:attrNameLst>
-                                          <p:attrName>style.visibility</p:attrName>
-                                        </p:attrNameLst>
-                                      </p:cBhvr>
-                                      <p:to>
-                                        <p:strVal val="hidden"/>
-                                      </p:to>
-                                    </p:set>
-                                  </p:childTnLst>
-                                </p:cTn>
-                              </p:par>
-                            </p:childTnLst>
-                          </p:cTn>
-                        </p:par>
-                      </p:childTnLst>
-                    </p:cTn>
-                  </p:par>
-                </p:childTnLst>
-              </p:cTn>
-              <p:prevCondLst>
-                <p:cond evt="onPrev" delay="0">
-                  <p:tgtEl>
-                    <p:sldTgt/>
-                  </p:tgtEl>
-                </p:cond>
-              </p:prevCondLst>
-              <p:nextCondLst>
-                <p:cond evt="onNext" delay="0">
-                  <p:tgtEl>
-                    <p:sldTgt/>
-                  </p:tgtEl>
-                </p:cond>
-              </p:nextCondLst>
-            </p:seq>
-          </p:childTnLst>
-        </p:cTn>
-      </p:par>
-    </p:tnLst>
-    <p:bldLst>
-      <p:bldP spid="4" grpId="0" animBg="1"/>
-    </p:bldLst>
-  </p:timing>
 </p:sld>
 </file>
 
@@ -17816,7 +18203,7 @@
               <a:rPr lang="en-US" dirty="0">
                 <a:latin typeface="Georgia" panose="02040502050405020303" pitchFamily="18" charset="0"/>
               </a:rPr>
-              <a:t>Prerequisite overrides will be considered on a case-by-case basis. We expect that you are familiar with basic probability, modular arithmetic, and logarithms.</a:t>
+              <a:t>Prerequisite overrides will be considered on a case-by-case basis. We expect that you are familiar with basic probability, modular arithmetic.</a:t>
             </a:r>
           </a:p>
         </p:txBody>
@@ -17824,7 +18211,7 @@
     </p:spTree>
     <p:extLst>
       <p:ext uri="{BB962C8B-B14F-4D97-AF65-F5344CB8AC3E}">
-        <p14:creationId xmlns:p14="http://schemas.microsoft.com/office/powerpoint/2010/main" val="3281560994"/>
+        <p14:creationId xmlns:p14="http://schemas.microsoft.com/office/powerpoint/2010/main" val="4257667795"/>
       </p:ext>
     </p:extLst>
   </p:cSld>
@@ -17904,363 +18291,149 @@
         </p:nvSpPr>
         <p:spPr>
           <a:xfrm>
-            <a:off x="838200" y="1060704"/>
-            <a:ext cx="10515600" cy="5609037"/>
+            <a:off x="838200" y="1422400"/>
+            <a:ext cx="10795000" cy="5080000"/>
           </a:xfrm>
         </p:spPr>
         <p:txBody>
           <a:bodyPr>
-            <a:normAutofit fontScale="92500" lnSpcReduction="20000"/>
+            <a:normAutofit/>
           </a:bodyPr>
           <a:lstStyle/>
           <a:p>
             <a:r>
-              <a:rPr lang="en-US" b="1" dirty="0">
-                <a:latin typeface="Georgia" panose="02040502050405020303" pitchFamily="18" charset="0"/>
-              </a:rPr>
-              <a:t>Class participation (10%)</a:t>
-            </a:r>
-            <a:r>
-              <a:rPr lang="en-US" b="0" i="0" dirty="0">
+              <a:rPr lang="en-US" sz="1800" b="1" dirty="0">
+                <a:latin typeface="Georgia" panose="02040502050405020303" pitchFamily="18" charset="0"/>
+              </a:rPr>
+              <a:t>In-Class Quizzes (10%)</a:t>
+            </a:r>
+          </a:p>
+          <a:p>
+            <a:pPr lvl="1"/>
+            <a:r>
+              <a:rPr lang="en-US" sz="1600" dirty="0">
+                <a:latin typeface="Georgia" panose="02040502050405020303" pitchFamily="18" charset="0"/>
+              </a:rPr>
+              <a:t>Average of all quiz scores, scaled to 100</a:t>
+            </a:r>
+          </a:p>
+          <a:p>
+            <a:r>
+              <a:rPr lang="en-US" sz="1800" b="1" dirty="0">
+                <a:latin typeface="Georgia" panose="02040502050405020303" pitchFamily="18" charset="0"/>
+              </a:rPr>
+              <a:t>Homework (20%)</a:t>
+            </a:r>
+          </a:p>
+          <a:p>
+            <a:pPr lvl="1"/>
+            <a:r>
+              <a:rPr lang="en-US" sz="1600" dirty="0">
+                <a:latin typeface="Georgia" panose="02040502050405020303" pitchFamily="18" charset="0"/>
+              </a:rPr>
+              <a:t>5 assignments</a:t>
+            </a:r>
+          </a:p>
+          <a:p>
+            <a:pPr lvl="1"/>
+            <a:r>
+              <a:rPr lang="en-US" sz="1600" dirty="0">
+                <a:latin typeface="Georgia" panose="02040502050405020303" pitchFamily="18" charset="0"/>
+              </a:rPr>
+              <a:t>Submit a single PDF compiled from LaTeX — no Word, Google Docs, or photos</a:t>
+            </a:r>
+          </a:p>
+          <a:p>
+            <a:pPr lvl="1"/>
+            <a:r>
+              <a:rPr lang="en-US" sz="1600" dirty="0">
+                <a:latin typeface="Georgia" panose="02040502050405020303" pitchFamily="18" charset="0"/>
+              </a:rPr>
+              <a:t>No late submissions</a:t>
+            </a:r>
+          </a:p>
+          <a:p>
+            <a:pPr lvl="1"/>
+            <a:r>
+              <a:rPr lang="en-US" sz="1600" b="1" dirty="0">
                 <a:solidFill>
-                  <a:srgbClr val="000000"/>
+                  <a:srgbClr val="C00000"/>
                 </a:solidFill>
-                <a:effectLst/>
-                <a:latin typeface="Georgia" panose="02040502050405020303" pitchFamily="18" charset="0"/>
-              </a:rPr>
-              <a:t>.</a:t>
-            </a:r>
-          </a:p>
-          <a:p>
-            <a:r>
-              <a:rPr lang="en-US" b="1" dirty="0">
-                <a:latin typeface="Georgia" panose="02040502050405020303" pitchFamily="18" charset="0"/>
-              </a:rPr>
-              <a:t>In-class quiz 10%, </a:t>
+                <a:latin typeface="Georgia" panose="02040502050405020303" pitchFamily="18" charset="0"/>
+              </a:rPr>
+              <a:t>AI tools are NOT allowed unless stated otherwise</a:t>
+            </a:r>
+          </a:p>
+          <a:p>
+            <a:r>
+              <a:rPr lang="en-US" sz="1800" b="1" dirty="0">
+                <a:latin typeface="Georgia" panose="02040502050405020303" pitchFamily="18" charset="0"/>
+              </a:rPr>
+              <a:t>Midterm Exam (20%)</a:t>
             </a:r>
           </a:p>
           <a:p>
             <a:pPr lvl="1"/>
             <a:r>
-              <a:rPr lang="en-US" altLang="zh-CN" dirty="0">
-                <a:latin typeface="Georgia" panose="02040502050405020303" pitchFamily="18" charset="0"/>
-              </a:rPr>
-              <a:t>Each quiz is selected with probability </a:t>
-            </a:r>
-            <a:r>
-              <a:rPr lang="en-US" altLang="zh-CN" b="1" dirty="0">
+              <a:rPr lang="en-US" sz="1600" dirty="0">
+                <a:latin typeface="Georgia" panose="02040502050405020303" pitchFamily="18" charset="0"/>
+              </a:rPr>
+              <a:t>In class</a:t>
+            </a:r>
+          </a:p>
+          <a:p>
+            <a:pPr lvl="1"/>
+            <a:r>
+              <a:rPr lang="en-US" sz="1600" dirty="0">
+                <a:latin typeface="Georgia" panose="02040502050405020303" pitchFamily="18" charset="0"/>
+              </a:rPr>
+              <a:t>You must pass the midterm to pass the course</a:t>
+            </a:r>
+          </a:p>
+          <a:p>
+            <a:r>
+              <a:rPr lang="en-US" sz="1800" b="1" dirty="0">
+                <a:latin typeface="Georgia" panose="02040502050405020303" pitchFamily="18" charset="0"/>
+              </a:rPr>
+              <a:t>Final Exam (30%)</a:t>
+            </a:r>
+          </a:p>
+          <a:p>
+            <a:pPr lvl="1"/>
+            <a:r>
+              <a:rPr lang="en-US" sz="1600" dirty="0">
+                <a:latin typeface="Georgia" panose="02040502050405020303" pitchFamily="18" charset="0"/>
+              </a:rPr>
+              <a:t>Cumulative</a:t>
+            </a:r>
+          </a:p>
+          <a:p>
+            <a:r>
+              <a:rPr lang="en-US" sz="1800" b="1" dirty="0">
+                <a:latin typeface="Georgia" panose="02040502050405020303" pitchFamily="18" charset="0"/>
+              </a:rPr>
+              <a:t>Final Project (20%)</a:t>
+            </a:r>
+          </a:p>
+          <a:p>
+            <a:pPr lvl="1"/>
+            <a:r>
+              <a:rPr lang="en-US" sz="1600" dirty="0">
+                <a:latin typeface="Georgia" panose="02040502050405020303" pitchFamily="18" charset="0"/>
+              </a:rPr>
+              <a:t>Design a cryptographic application of the course content</a:t>
+            </a:r>
+          </a:p>
+          <a:p>
+            <a:pPr lvl="1"/>
+            <a:r>
+              <a:rPr lang="en-US" sz="1600" b="1" dirty="0">
                 <a:solidFill>
-                  <a:srgbClr val="FF0000"/>
+                  <a:srgbClr val="C00000"/>
                 </a:solidFill>
                 <a:latin typeface="Georgia" panose="02040502050405020303" pitchFamily="18" charset="0"/>
               </a:rPr>
-              <a:t>80%</a:t>
-            </a:r>
-            <a:r>
-              <a:rPr lang="en-US" altLang="zh-CN" dirty="0">
-                <a:latin typeface="Georgia" panose="02040502050405020303" pitchFamily="18" charset="0"/>
-              </a:rPr>
-              <a:t>. </a:t>
-            </a:r>
-          </a:p>
-          <a:p>
-            <a:pPr lvl="1"/>
-            <a:r>
-              <a:rPr lang="en-US" altLang="zh-CN" dirty="0">
-                <a:latin typeface="Georgia" panose="02040502050405020303" pitchFamily="18" charset="0"/>
-              </a:rPr>
-              <a:t>The final grade is calculated as the average score of the selected quizzes, scaled to 100.</a:t>
-            </a:r>
-          </a:p>
-          <a:p>
-            <a:pPr lvl="1"/>
-            <a:r>
-              <a:rPr lang="en-US" altLang="zh-CN" dirty="0">
-                <a:latin typeface="Georgia" panose="02040502050405020303" pitchFamily="18" charset="0"/>
-              </a:rPr>
-              <a:t>Test: </a:t>
-            </a:r>
-            <a:r>
-              <a:rPr lang="en-US" b="0" i="0" dirty="0">
-                <a:solidFill>
-                  <a:srgbClr val="273540"/>
-                </a:solidFill>
-                <a:effectLst/>
-                <a:latin typeface="Georgia" panose="02040502050405020303" pitchFamily="18" charset="0"/>
-              </a:rPr>
-              <a:t>Crypto34399</a:t>
-            </a:r>
-            <a:endParaRPr lang="en-US" altLang="zh-CN" dirty="0">
-              <a:latin typeface="Georgia" panose="02040502050405020303" pitchFamily="18" charset="0"/>
-            </a:endParaRPr>
-          </a:p>
-          <a:p>
-            <a:r>
-              <a:rPr lang="en-US" b="1" dirty="0">
-                <a:latin typeface="Georgia" panose="02040502050405020303" pitchFamily="18" charset="0"/>
-              </a:rPr>
-              <a:t>Homework (50%):</a:t>
-            </a:r>
-          </a:p>
-          <a:p>
-            <a:pPr lvl="1"/>
-            <a:r>
-              <a:rPr lang="en-US" dirty="0">
-                <a:latin typeface="Georgia" panose="02040502050405020303" pitchFamily="18" charset="0"/>
-              </a:rPr>
-              <a:t>5 assignments</a:t>
-            </a:r>
-          </a:p>
-          <a:p>
-            <a:pPr lvl="1"/>
-            <a:r>
-              <a:rPr lang="en-US" b="0" i="0" dirty="0">
-                <a:solidFill>
-                  <a:srgbClr val="1B1B1B"/>
-                </a:solidFill>
-                <a:effectLst/>
-                <a:latin typeface="Georgia" panose="02040502050405020303" pitchFamily="18" charset="0"/>
-              </a:rPr>
-              <a:t>Each homework will include careful instructions, with long-form problem write-ups and proofs.</a:t>
-            </a:r>
-            <a:endParaRPr lang="en-US" dirty="0">
-              <a:latin typeface="Georgia" panose="02040502050405020303" pitchFamily="18" charset="0"/>
-            </a:endParaRPr>
-          </a:p>
-          <a:p>
-            <a:pPr lvl="1"/>
-            <a:r>
-              <a:rPr lang="en-US" dirty="0">
-                <a:latin typeface="Georgia" panose="02040502050405020303" pitchFamily="18" charset="0"/>
-              </a:rPr>
-              <a:t>Submit a single PDF compiled from LaTeX. </a:t>
-            </a:r>
-            <a:r>
-              <a:rPr lang="zh-CN" altLang="en-US" dirty="0">
-                <a:latin typeface="Georgia" panose="02040502050405020303" pitchFamily="18" charset="0"/>
-              </a:rPr>
-              <a:t> </a:t>
-            </a:r>
-            <a:r>
-              <a:rPr lang="en-US" altLang="zh-CN" dirty="0">
-                <a:latin typeface="Georgia" panose="02040502050405020303" pitchFamily="18" charset="0"/>
-              </a:rPr>
-              <a:t>No</a:t>
-            </a:r>
-            <a:r>
-              <a:rPr lang="zh-CN" altLang="en-US" dirty="0">
-                <a:latin typeface="Georgia" panose="02040502050405020303" pitchFamily="18" charset="0"/>
-              </a:rPr>
-              <a:t> </a:t>
-            </a:r>
-            <a:r>
-              <a:rPr lang="en-US" dirty="0">
-                <a:latin typeface="Georgia" panose="02040502050405020303" pitchFamily="18" charset="0"/>
-              </a:rPr>
-              <a:t>Word/Google Docs</a:t>
-            </a:r>
-            <a:r>
-              <a:rPr lang="en-US" altLang="zh-CN" dirty="0">
-                <a:latin typeface="Georgia" panose="02040502050405020303" pitchFamily="18" charset="0"/>
-              </a:rPr>
-              <a:t>/Pictures</a:t>
-            </a:r>
-            <a:endParaRPr lang="en-US" dirty="0">
-              <a:latin typeface="Georgia" panose="02040502050405020303" pitchFamily="18" charset="0"/>
-            </a:endParaRPr>
-          </a:p>
-          <a:p>
-            <a:pPr lvl="1"/>
-            <a:r>
-              <a:rPr lang="en-US" dirty="0">
-                <a:latin typeface="Georgia" panose="02040502050405020303" pitchFamily="18" charset="0"/>
-              </a:rPr>
-              <a:t>No late submission</a:t>
-            </a:r>
-            <a:r>
-              <a:rPr lang="en-US" altLang="zh-CN" b="1" dirty="0">
-                <a:latin typeface="Georgia" panose="02040502050405020303" pitchFamily="18" charset="0"/>
-              </a:rPr>
-              <a:t>.</a:t>
-            </a:r>
-            <a:r>
-              <a:rPr lang="zh-CN" altLang="en-US" b="1" dirty="0">
-                <a:solidFill>
-                  <a:srgbClr val="FF0000"/>
-                </a:solidFill>
-                <a:latin typeface="Georgia" panose="02040502050405020303" pitchFamily="18" charset="0"/>
-              </a:rPr>
-              <a:t> </a:t>
-            </a:r>
-            <a:endParaRPr lang="en-US" altLang="zh-CN" b="1" dirty="0">
-              <a:solidFill>
-                <a:srgbClr val="FF0000"/>
-              </a:solidFill>
-              <a:latin typeface="Georgia" panose="02040502050405020303" pitchFamily="18" charset="0"/>
-            </a:endParaRPr>
-          </a:p>
-          <a:p>
-            <a:pPr lvl="1"/>
-            <a:r>
-              <a:rPr lang="en-US" altLang="zh-CN" b="1" dirty="0">
-                <a:solidFill>
-                  <a:srgbClr val="FF0000"/>
-                </a:solidFill>
-                <a:latin typeface="Georgia" panose="02040502050405020303" pitchFamily="18" charset="0"/>
-              </a:rPr>
-              <a:t>AI-based</a:t>
-            </a:r>
-            <a:r>
-              <a:rPr lang="zh-CN" altLang="en-US" b="1" dirty="0">
-                <a:solidFill>
-                  <a:srgbClr val="FF0000"/>
-                </a:solidFill>
-                <a:latin typeface="Georgia" panose="02040502050405020303" pitchFamily="18" charset="0"/>
-              </a:rPr>
-              <a:t> </a:t>
-            </a:r>
-            <a:r>
-              <a:rPr lang="en-US" altLang="zh-CN" b="1" dirty="0">
-                <a:solidFill>
-                  <a:srgbClr val="FF0000"/>
-                </a:solidFill>
-                <a:latin typeface="Georgia" panose="02040502050405020303" pitchFamily="18" charset="0"/>
-              </a:rPr>
-              <a:t>tool</a:t>
-            </a:r>
-            <a:r>
-              <a:rPr lang="zh-CN" altLang="en-US" b="1" dirty="0">
-                <a:solidFill>
-                  <a:srgbClr val="FF0000"/>
-                </a:solidFill>
-                <a:latin typeface="Georgia" panose="02040502050405020303" pitchFamily="18" charset="0"/>
-              </a:rPr>
-              <a:t> </a:t>
-            </a:r>
-            <a:r>
-              <a:rPr lang="en-US" altLang="zh-CN" b="1" dirty="0">
-                <a:solidFill>
-                  <a:srgbClr val="FF0000"/>
-                </a:solidFill>
-                <a:latin typeface="Georgia" panose="02040502050405020303" pitchFamily="18" charset="0"/>
-              </a:rPr>
-              <a:t>is</a:t>
-            </a:r>
-            <a:r>
-              <a:rPr lang="zh-CN" altLang="en-US" b="1" dirty="0">
-                <a:solidFill>
-                  <a:srgbClr val="FF0000"/>
-                </a:solidFill>
-                <a:latin typeface="Georgia" panose="02040502050405020303" pitchFamily="18" charset="0"/>
-              </a:rPr>
-              <a:t> </a:t>
-            </a:r>
-            <a:r>
-              <a:rPr lang="en-US" altLang="zh-CN" b="1" dirty="0">
-                <a:solidFill>
-                  <a:srgbClr val="FF0000"/>
-                </a:solidFill>
-                <a:latin typeface="Georgia" panose="02040502050405020303" pitchFamily="18" charset="0"/>
-              </a:rPr>
-              <a:t>not</a:t>
-            </a:r>
-            <a:r>
-              <a:rPr lang="zh-CN" altLang="en-US" b="1" dirty="0">
-                <a:solidFill>
-                  <a:srgbClr val="FF0000"/>
-                </a:solidFill>
-                <a:latin typeface="Georgia" panose="02040502050405020303" pitchFamily="18" charset="0"/>
-              </a:rPr>
-              <a:t> </a:t>
-            </a:r>
-            <a:r>
-              <a:rPr lang="en-US" altLang="zh-CN" b="1" dirty="0">
-                <a:solidFill>
-                  <a:srgbClr val="FF0000"/>
-                </a:solidFill>
-                <a:latin typeface="Georgia" panose="02040502050405020303" pitchFamily="18" charset="0"/>
-              </a:rPr>
-              <a:t>allowed.</a:t>
-            </a:r>
-            <a:endParaRPr lang="en-US" b="1" dirty="0">
-              <a:solidFill>
-                <a:srgbClr val="FF0000"/>
-              </a:solidFill>
-              <a:latin typeface="Georgia" panose="02040502050405020303" pitchFamily="18" charset="0"/>
-            </a:endParaRPr>
-          </a:p>
-          <a:p>
-            <a:r>
-              <a:rPr lang="en-US" b="1" dirty="0">
-                <a:latin typeface="Georgia" panose="02040502050405020303" pitchFamily="18" charset="0"/>
-              </a:rPr>
-              <a:t>Midterm Exam (</a:t>
-            </a:r>
-            <a:r>
-              <a:rPr lang="en-US" altLang="zh-CN" b="1" dirty="0">
-                <a:latin typeface="Georgia" panose="02040502050405020303" pitchFamily="18" charset="0"/>
-              </a:rPr>
-              <a:t>20</a:t>
-            </a:r>
-            <a:r>
-              <a:rPr lang="en-US" b="1" dirty="0">
-                <a:latin typeface="Georgia" panose="02040502050405020303" pitchFamily="18" charset="0"/>
-              </a:rPr>
-              <a:t>%):</a:t>
-            </a:r>
-          </a:p>
-          <a:p>
-            <a:pPr lvl="1"/>
-            <a:r>
-              <a:rPr lang="en-US" b="1" dirty="0">
-                <a:latin typeface="Georgia" panose="02040502050405020303" pitchFamily="18" charset="0"/>
-              </a:rPr>
-              <a:t>5:00-6:20pm, Tuesday, October </a:t>
-            </a:r>
-            <a:r>
-              <a:rPr lang="en-US" altLang="zh-CN" b="1" dirty="0">
-                <a:latin typeface="Georgia" panose="02040502050405020303" pitchFamily="18" charset="0"/>
-              </a:rPr>
-              <a:t>7</a:t>
-            </a:r>
-            <a:r>
-              <a:rPr lang="en-US" b="1" dirty="0">
-                <a:latin typeface="Georgia" panose="02040502050405020303" pitchFamily="18" charset="0"/>
-              </a:rPr>
-              <a:t>, in class</a:t>
-            </a:r>
-          </a:p>
-          <a:p>
-            <a:r>
-              <a:rPr lang="en-US" b="1" dirty="0">
-                <a:latin typeface="Georgia" panose="02040502050405020303" pitchFamily="18" charset="0"/>
-              </a:rPr>
-              <a:t>Final Exam (</a:t>
-            </a:r>
-            <a:r>
-              <a:rPr lang="en-US" altLang="zh-CN" b="1" dirty="0">
-                <a:latin typeface="Georgia" panose="02040502050405020303" pitchFamily="18" charset="0"/>
-              </a:rPr>
-              <a:t>20</a:t>
-            </a:r>
-            <a:r>
-              <a:rPr lang="en-US" b="1" dirty="0">
-                <a:latin typeface="Georgia" panose="02040502050405020303" pitchFamily="18" charset="0"/>
-              </a:rPr>
-              <a:t>%):</a:t>
-            </a:r>
-          </a:p>
-          <a:p>
-            <a:pPr lvl="1"/>
-            <a:r>
-              <a:rPr lang="en-US" b="0" i="0" dirty="0">
-                <a:solidFill>
-                  <a:srgbClr val="000000"/>
-                </a:solidFill>
-                <a:effectLst/>
-                <a:latin typeface="Georgia" panose="02040502050405020303" pitchFamily="18" charset="0"/>
-              </a:rPr>
-              <a:t>cumulative </a:t>
+              <a:t>AI tools ARE allowed</a:t>
             </a:r>
           </a:p>
         </p:txBody>
@@ -18309,7 +18482,7 @@
     </p:spTree>
     <p:extLst>
       <p:ext uri="{BB962C8B-B14F-4D97-AF65-F5344CB8AC3E}">
-        <p14:creationId xmlns:p14="http://schemas.microsoft.com/office/powerpoint/2010/main" val="4116257667"/>
+        <p14:creationId xmlns:p14="http://schemas.microsoft.com/office/powerpoint/2010/main" val="4104098883"/>
       </p:ext>
     </p:extLst>
   </p:cSld>
@@ -18410,7 +18583,7 @@
               <a:rPr lang="en-US" dirty="0">
                 <a:latin typeface="Georgia" panose="02040502050405020303" pitchFamily="18" charset="0"/>
               </a:rPr>
-              <a:t> 20%. </a:t>
+              <a:t> </a:t>
             </a:r>
           </a:p>
           <a:p>
@@ -18421,46 +18594,8 @@
               <a:rPr lang="en-US" dirty="0">
                 <a:latin typeface="Georgia" panose="02040502050405020303" pitchFamily="18" charset="0"/>
               </a:rPr>
-              <a:t>In teams of 2, you will read</a:t>
-            </a:r>
-            <a:r>
-              <a:rPr lang="zh-CN" altLang="en-US" dirty="0">
-                <a:latin typeface="Georgia" panose="02040502050405020303" pitchFamily="18" charset="0"/>
-              </a:rPr>
-              <a:t> </a:t>
-            </a:r>
-            <a:r>
-              <a:rPr lang="en-US" altLang="zh-CN" dirty="0">
-                <a:latin typeface="Georgia" panose="02040502050405020303" pitchFamily="18" charset="0"/>
-              </a:rPr>
-              <a:t>and</a:t>
-            </a:r>
-            <a:r>
-              <a:rPr lang="zh-CN" altLang="en-US" dirty="0">
-                <a:latin typeface="Georgia" panose="02040502050405020303" pitchFamily="18" charset="0"/>
-              </a:rPr>
-              <a:t> </a:t>
-            </a:r>
-            <a:r>
-              <a:rPr lang="en-US" altLang="zh-CN" dirty="0">
-                <a:latin typeface="Georgia" panose="02040502050405020303" pitchFamily="18" charset="0"/>
-              </a:rPr>
-              <a:t>present</a:t>
-            </a:r>
-            <a:r>
-              <a:rPr lang="en-US" dirty="0">
-                <a:latin typeface="Georgia" panose="02040502050405020303" pitchFamily="18" charset="0"/>
-              </a:rPr>
-              <a:t> papers in the cryptography literature.</a:t>
-            </a:r>
-          </a:p>
-          <a:p>
-            <a:pPr marL="0" indent="0">
-              <a:buNone/>
-            </a:pPr>
-            <a:endParaRPr lang="en-US" dirty="0">
-              <a:latin typeface="Georgia" panose="02040502050405020303" pitchFamily="18" charset="0"/>
-            </a:endParaRPr>
+              <a:t>You will read and write reviews of papers in the cryptography literature.</a:t>
+            </a:r>
           </a:p>
           <a:p>
             <a:pPr marL="0" indent="0">
@@ -19599,4 +19734,26 @@
     </a:ext>
   </a:extLst>
 </a:theme>
+</file>
+
+<file path=ppt/webextensions/taskpanes.xml><?xml version="1.0" encoding="utf-8"?>
+<wetp:taskpanes xmlns:wetp="http://schemas.microsoft.com/office/webextensions/taskpanes/2010/11">
+  <wetp:taskpane dockstate="right" visibility="0" width="350" row="0">
+    <wetp:webextensionref xmlns:r="http://schemas.openxmlformats.org/officeDocument/2006/relationships" r:id="rId1"/>
+  </wetp:taskpane>
+</wetp:taskpanes>
+</file>
+
+<file path=ppt/webextensions/webextension1.xml><?xml version="1.0" encoding="utf-8"?>
+<we:webextension xmlns:we="http://schemas.microsoft.com/office/webextensions/webextension/2010/11" id="{C8C1E79C-0C23-574C-A596-25CEC1C0E40A}">
+  <we:reference id="wa200010001" version="1.0.0.1" store="en-US" storeType="OMEX"/>
+  <we:alternateReferences>
+    <we:reference id="wa200010001" version="1.0.0.1" store="en-US" storeType="OMEX"/>
+  </we:alternateReferences>
+  <we:properties>
+    <we:property name="claude.fileId" value="&quot;74888bd3-6e02-4abf-8a2e-ec92a94a474e&quot;"/>
+  </we:properties>
+  <we:bindings/>
+  <we:snapshot xmlns:r="http://schemas.openxmlformats.org/officeDocument/2006/relationships"/>
+</we:webextension>
 </file>